--- a/军民融合/ppt/图1.pptx
+++ b/军民融合/ppt/图1.pptx
@@ -4486,7 +4486,7 @@
         </p:nvSpPr>
         <p:spPr>
           <a:xfrm>
-            <a:off x="1230630" y="6154738"/>
+            <a:off x="1224915" y="6154738"/>
             <a:ext cx="2508885" cy="297180"/>
           </a:xfrm>
           <a:prstGeom prst="rect">
@@ -4572,7 +4572,7 @@
         </p:nvSpPr>
         <p:spPr>
           <a:xfrm>
-            <a:off x="7164070" y="6154738"/>
+            <a:off x="7180580" y="6154738"/>
             <a:ext cx="2487295" cy="297180"/>
           </a:xfrm>
           <a:prstGeom prst="rect">
@@ -5300,7 +5300,7 @@
         </p:blipFill>
         <p:spPr>
           <a:xfrm>
-            <a:off x="1429703" y="6665595"/>
+            <a:off x="1423988" y="6665595"/>
             <a:ext cx="2110740" cy="927735"/>
           </a:xfrm>
           <a:prstGeom prst="rect">
@@ -5425,7 +5425,7 @@
         </p:blipFill>
         <p:spPr>
           <a:xfrm>
-            <a:off x="4311650" y="6618605"/>
+            <a:off x="4290060" y="6618605"/>
             <a:ext cx="2226945" cy="867410"/>
           </a:xfrm>
           <a:prstGeom prst="rect">
@@ -5450,7 +5450,7 @@
         </p:blipFill>
         <p:spPr>
           <a:xfrm>
-            <a:off x="7192010" y="6665595"/>
+            <a:off x="7204075" y="6665595"/>
             <a:ext cx="2440305" cy="820420"/>
           </a:xfrm>
           <a:prstGeom prst="rect">
@@ -5466,7 +5466,7 @@
         </p:nvSpPr>
         <p:spPr>
           <a:xfrm>
-            <a:off x="1557338" y="7798435"/>
+            <a:off x="1551623" y="7798435"/>
             <a:ext cx="1855470" cy="297180"/>
           </a:xfrm>
           <a:prstGeom prst="rect">
@@ -5541,7 +5541,7 @@
         </p:nvSpPr>
         <p:spPr>
           <a:xfrm>
-            <a:off x="4518343" y="7798435"/>
+            <a:off x="4475798" y="7798435"/>
             <a:ext cx="1855470" cy="297180"/>
           </a:xfrm>
           <a:prstGeom prst="rect">
@@ -5616,7 +5616,7 @@
         </p:nvSpPr>
         <p:spPr>
           <a:xfrm>
-            <a:off x="7504113" y="7798435"/>
+            <a:off x="7496493" y="7798435"/>
             <a:ext cx="1855470" cy="297180"/>
           </a:xfrm>
           <a:prstGeom prst="rect">

--- a/军民融合/ppt/图1.pptx
+++ b/军民融合/ppt/图1.pptx
@@ -7,8 +7,8 @@
   <p:sldIdLst>
     <p:sldId id="256" r:id="rId3"/>
   </p:sldIdLst>
-  <p:sldSz cx="10079990" cy="10079990"/>
-  <p:notesSz cx="9144000" cy="6858000"/>
+  <p:sldSz cx="10079990" cy="9359900"/>
+  <p:notesSz cx="6858000" cy="9144000"/>
   <p:defaultTextStyle>
     <a:defPPr>
       <a:defRPr lang="zh-CN"/>
@@ -107,12 +107,12 @@
   <p:extLst>
     <p:ext uri="{EFAFB233-063F-42B5-8137-9DF3F51BA10A}">
       <p15:sldGuideLst xmlns:p15="http://schemas.microsoft.com/office/powerpoint/2012/main">
-        <p15:guide id="1" orient="horz" pos="3166" userDrawn="1">
+        <p15:guide id="1" orient="horz" pos="2948" userDrawn="1">
           <p15:clr>
             <a:srgbClr val="A4A3A4"/>
           </p15:clr>
         </p15:guide>
-        <p15:guide id="2" pos="3184" userDrawn="1">
+        <p15:guide id="2" pos="3175" userDrawn="1">
           <p15:clr>
             <a:srgbClr val="A4A3A4"/>
           </p15:clr>
@@ -155,8 +155,8 @@
         </p:nvSpPr>
         <p:spPr>
           <a:xfrm>
-            <a:off x="991164" y="1344041"/>
-            <a:ext cx="8101949" cy="3778131"/>
+            <a:off x="991134" y="1248000"/>
+            <a:ext cx="8101701" cy="3508157"/>
           </a:xfrm>
         </p:spPr>
         <p:txBody>
@@ -192,8 +192,8 @@
         </p:nvSpPr>
         <p:spPr>
           <a:xfrm>
-            <a:off x="991164" y="5233294"/>
-            <a:ext cx="8101949" cy="2164224"/>
+            <a:off x="991134" y="4859338"/>
+            <a:ext cx="8101701" cy="2009575"/>
           </a:xfrm>
         </p:spPr>
         <p:txBody>
@@ -206,39 +206,39 @@
                 <a:spcPct val="110000"/>
               </a:lnSpc>
               <a:buNone/>
-              <a:defRPr sz="2650" spc="200"/>
+              <a:defRPr sz="2645" spc="200"/>
             </a:lvl1pPr>
             <a:lvl2pPr marL="504190" indent="0" algn="ctr">
               <a:buNone/>
               <a:defRPr sz="2205"/>
             </a:lvl2pPr>
-            <a:lvl3pPr marL="1008380" indent="0" algn="ctr">
+            <a:lvl3pPr marL="1007745" indent="0" algn="ctr">
               <a:buNone/>
               <a:defRPr sz="1985"/>
             </a:lvl3pPr>
             <a:lvl4pPr marL="1511935" indent="0" algn="ctr">
               <a:buNone/>
-              <a:defRPr sz="1760"/>
+              <a:defRPr sz="1765"/>
             </a:lvl4pPr>
             <a:lvl5pPr marL="2016125" indent="0" algn="ctr">
               <a:buNone/>
-              <a:defRPr sz="1760"/>
+              <a:defRPr sz="1765"/>
             </a:lvl5pPr>
             <a:lvl6pPr marL="2520315" indent="0" algn="ctr">
               <a:buNone/>
-              <a:defRPr sz="1760"/>
+              <a:defRPr sz="1765"/>
             </a:lvl6pPr>
-            <a:lvl7pPr marL="3024505" indent="0" algn="ctr">
+            <a:lvl7pPr marL="3023870" indent="0" algn="ctr">
               <a:buNone/>
-              <a:defRPr sz="1760"/>
+              <a:defRPr sz="1765"/>
             </a:lvl7pPr>
             <a:lvl8pPr marL="3528060" indent="0" algn="ctr">
               <a:buNone/>
-              <a:defRPr sz="1760"/>
+              <a:defRPr sz="1765"/>
             </a:lvl8pPr>
             <a:lvl9pPr marL="4032250" indent="0" algn="ctr">
               <a:buNone/>
-              <a:defRPr sz="1760"/>
+              <a:defRPr sz="1765"/>
             </a:lvl9pPr>
           </a:lstStyle>
           <a:p>
@@ -434,8 +434,8 @@
         </p:nvSpPr>
         <p:spPr>
           <a:xfrm>
-            <a:off x="503023" y="1137673"/>
-            <a:ext cx="9072278" cy="8058955"/>
+            <a:off x="503008" y="1056378"/>
+            <a:ext cx="9072000" cy="7483086"/>
           </a:xfrm>
         </p:spPr>
         <p:txBody>
@@ -595,8 +595,8 @@
         </p:nvSpPr>
         <p:spPr>
           <a:xfrm>
-            <a:off x="991164" y="3651135"/>
-            <a:ext cx="8101949" cy="1497495"/>
+            <a:off x="991134" y="3390236"/>
+            <a:ext cx="8101701" cy="1390488"/>
           </a:xfrm>
         </p:spPr>
         <p:txBody>
@@ -633,8 +633,8 @@
         </p:nvSpPr>
         <p:spPr>
           <a:xfrm>
-            <a:off x="991164" y="5233294"/>
-            <a:ext cx="8101949" cy="693187"/>
+            <a:off x="991134" y="4859338"/>
+            <a:ext cx="8101701" cy="643654"/>
           </a:xfrm>
         </p:spPr>
         <p:txBody>
@@ -647,7 +647,7 @@
                 <a:spcPct val="110000"/>
               </a:lnSpc>
               <a:buNone/>
-              <a:defRPr sz="2650" spc="200"/>
+              <a:defRPr sz="2645" spc="200"/>
             </a:lvl1pPr>
           </a:lstStyle>
           <a:p>
@@ -700,8 +700,8 @@
         </p:nvSpPr>
         <p:spPr>
           <a:xfrm>
-            <a:off x="503023" y="894264"/>
-            <a:ext cx="9069301" cy="1037134"/>
+            <a:off x="503008" y="830362"/>
+            <a:ext cx="9069024" cy="963024"/>
           </a:xfrm>
         </p:spPr>
         <p:txBody>
@@ -734,8 +734,8 @@
         </p:nvSpPr>
         <p:spPr>
           <a:xfrm>
-            <a:off x="503023" y="2190681"/>
-            <a:ext cx="9069301" cy="6995364"/>
+            <a:off x="503008" y="2034142"/>
+            <a:ext cx="9069024" cy="6495496"/>
           </a:xfrm>
         </p:spPr>
         <p:txBody>
@@ -897,8 +897,8 @@
         </p:nvSpPr>
         <p:spPr>
           <a:xfrm>
-            <a:off x="1645987" y="5656614"/>
-            <a:ext cx="6423220" cy="1127090"/>
+            <a:off x="1645937" y="5252409"/>
+            <a:ext cx="6423024" cy="1046551"/>
           </a:xfrm>
         </p:spPr>
         <p:txBody>
@@ -934,8 +934,8 @@
         </p:nvSpPr>
         <p:spPr>
           <a:xfrm>
-            <a:off x="1645987" y="6783704"/>
-            <a:ext cx="6423220" cy="1275252"/>
+            <a:off x="1645937" y="6298961"/>
+            <a:ext cx="6423024" cy="1184126"/>
           </a:xfrm>
         </p:spPr>
         <p:txBody>
@@ -956,7 +956,7 @@
             </a:lvl1pPr>
             <a:lvl2pPr marL="504190" indent="0">
               <a:buNone/>
-              <a:defRPr sz="1760">
+              <a:defRPr sz="1765">
                 <a:solidFill>
                   <a:schemeClr val="tx1">
                     <a:tint val="75000"/>
@@ -964,9 +964,9 @@
                 </a:solidFill>
               </a:defRPr>
             </a:lvl2pPr>
-            <a:lvl3pPr marL="1008380" indent="0">
+            <a:lvl3pPr marL="1007745" indent="0">
               <a:buNone/>
-              <a:defRPr sz="1760">
+              <a:defRPr sz="1765">
                 <a:solidFill>
                   <a:schemeClr val="tx1">
                     <a:tint val="75000"/>
@@ -976,7 +976,7 @@
             </a:lvl3pPr>
             <a:lvl4pPr marL="1511935" indent="0">
               <a:buNone/>
-              <a:defRPr sz="1760">
+              <a:defRPr sz="1765">
                 <a:solidFill>
                   <a:schemeClr val="tx1">
                     <a:tint val="75000"/>
@@ -986,7 +986,7 @@
             </a:lvl4pPr>
             <a:lvl5pPr marL="2016125" indent="0">
               <a:buNone/>
-              <a:defRPr sz="1760">
+              <a:defRPr sz="1765">
                 <a:solidFill>
                   <a:schemeClr val="tx1">
                     <a:tint val="75000"/>
@@ -996,7 +996,7 @@
             </a:lvl5pPr>
             <a:lvl6pPr marL="2520315" indent="0">
               <a:buNone/>
-              <a:defRPr sz="1760">
+              <a:defRPr sz="1765">
                 <a:solidFill>
                   <a:schemeClr val="tx1">
                     <a:tint val="75000"/>
@@ -1004,9 +1004,9 @@
                 </a:solidFill>
               </a:defRPr>
             </a:lvl6pPr>
-            <a:lvl7pPr marL="3024505" indent="0">
+            <a:lvl7pPr marL="3023870" indent="0">
               <a:buNone/>
-              <a:defRPr sz="1760">
+              <a:defRPr sz="1765">
                 <a:solidFill>
                   <a:schemeClr val="tx1">
                     <a:tint val="75000"/>
@@ -1016,7 +1016,7 @@
             </a:lvl7pPr>
             <a:lvl8pPr marL="3528060" indent="0">
               <a:buNone/>
-              <a:defRPr sz="1760">
+              <a:defRPr sz="1765">
                 <a:solidFill>
                   <a:schemeClr val="tx1">
                     <a:tint val="75000"/>
@@ -1026,7 +1026,7 @@
             </a:lvl8pPr>
             <a:lvl9pPr marL="4032250" indent="0">
               <a:buNone/>
-              <a:defRPr sz="1760">
+              <a:defRPr sz="1765">
                 <a:solidFill>
                   <a:schemeClr val="tx1">
                     <a:tint val="75000"/>
@@ -1157,8 +1157,8 @@
         </p:nvSpPr>
         <p:spPr>
           <a:xfrm>
-            <a:off x="503023" y="894264"/>
-            <a:ext cx="9069301" cy="1037134"/>
+            <a:off x="503008" y="830362"/>
+            <a:ext cx="9069024" cy="963024"/>
           </a:xfrm>
         </p:spPr>
         <p:txBody>
@@ -1191,8 +1191,8 @@
         </p:nvSpPr>
         <p:spPr>
           <a:xfrm>
-            <a:off x="503023" y="2206556"/>
-            <a:ext cx="4280162" cy="6979489"/>
+            <a:off x="503008" y="2048882"/>
+            <a:ext cx="4280031" cy="6480756"/>
           </a:xfrm>
         </p:spPr>
         <p:txBody>
@@ -1257,8 +1257,8 @@
         </p:nvSpPr>
         <p:spPr>
           <a:xfrm>
-            <a:off x="5301091" y="2206556"/>
-            <a:ext cx="4280162" cy="6979489"/>
+            <a:off x="5300929" y="2048882"/>
+            <a:ext cx="4280031" cy="6480756"/>
           </a:xfrm>
         </p:spPr>
         <p:txBody>
@@ -1420,8 +1420,8 @@
         </p:nvSpPr>
         <p:spPr>
           <a:xfrm>
-            <a:off x="503023" y="894264"/>
-            <a:ext cx="9069301" cy="1037134"/>
+            <a:off x="503008" y="830362"/>
+            <a:ext cx="9069024" cy="963024"/>
           </a:xfrm>
         </p:spPr>
         <p:txBody>
@@ -1454,8 +1454,8 @@
         </p:nvSpPr>
         <p:spPr>
           <a:xfrm>
-            <a:off x="503023" y="2100726"/>
-            <a:ext cx="4417080" cy="560899"/>
+            <a:off x="503008" y="1950614"/>
+            <a:ext cx="4416945" cy="520819"/>
           </a:xfrm>
         </p:spPr>
         <p:txBody>
@@ -1481,33 +1481,33 @@
               <a:buNone/>
               <a:defRPr sz="2205" b="1"/>
             </a:lvl2pPr>
-            <a:lvl3pPr marL="1008380" indent="0">
+            <a:lvl3pPr marL="1007745" indent="0">
               <a:buNone/>
               <a:defRPr sz="1985" b="1"/>
             </a:lvl3pPr>
             <a:lvl4pPr marL="1511935" indent="0">
               <a:buNone/>
-              <a:defRPr sz="1760" b="1"/>
+              <a:defRPr sz="1765" b="1"/>
             </a:lvl4pPr>
             <a:lvl5pPr marL="2016125" indent="0">
               <a:buNone/>
-              <a:defRPr sz="1760" b="1"/>
+              <a:defRPr sz="1765" b="1"/>
             </a:lvl5pPr>
             <a:lvl6pPr marL="2520315" indent="0">
               <a:buNone/>
-              <a:defRPr sz="1760" b="1"/>
+              <a:defRPr sz="1765" b="1"/>
             </a:lvl6pPr>
-            <a:lvl7pPr marL="3024505" indent="0">
+            <a:lvl7pPr marL="3023870" indent="0">
               <a:buNone/>
-              <a:defRPr sz="1760" b="1"/>
+              <a:defRPr sz="1765" b="1"/>
             </a:lvl7pPr>
             <a:lvl8pPr marL="3528060" indent="0">
               <a:buNone/>
-              <a:defRPr sz="1760" b="1"/>
+              <a:defRPr sz="1765" b="1"/>
             </a:lvl8pPr>
             <a:lvl9pPr marL="4032250" indent="0">
               <a:buNone/>
-              <a:defRPr sz="1760" b="1"/>
+              <a:defRPr sz="1765" b="1"/>
             </a:lvl9pPr>
           </a:lstStyle>
           <a:p>
@@ -1535,8 +1535,8 @@
         </p:nvSpPr>
         <p:spPr>
           <a:xfrm>
-            <a:off x="503023" y="2725123"/>
-            <a:ext cx="4417080" cy="6460922"/>
+            <a:off x="503008" y="2530394"/>
+            <a:ext cx="4416945" cy="5999244"/>
           </a:xfrm>
         </p:spPr>
         <p:txBody>
@@ -1601,8 +1601,8 @@
         </p:nvSpPr>
         <p:spPr>
           <a:xfrm>
-            <a:off x="5155699" y="2089744"/>
-            <a:ext cx="4417080" cy="560899"/>
+            <a:off x="5155541" y="1940417"/>
+            <a:ext cx="4416945" cy="520819"/>
           </a:xfrm>
         </p:spPr>
         <p:txBody>
@@ -1628,33 +1628,33 @@
               <a:buNone/>
               <a:defRPr sz="2205" b="1"/>
             </a:lvl2pPr>
-            <a:lvl3pPr marL="1008380" indent="0">
+            <a:lvl3pPr marL="1007745" indent="0">
               <a:buNone/>
               <a:defRPr sz="1985" b="1"/>
             </a:lvl3pPr>
             <a:lvl4pPr marL="1511935" indent="0">
               <a:buNone/>
-              <a:defRPr sz="1760" b="1"/>
+              <a:defRPr sz="1765" b="1"/>
             </a:lvl4pPr>
             <a:lvl5pPr marL="2016125" indent="0">
               <a:buNone/>
-              <a:defRPr sz="1760" b="1"/>
+              <a:defRPr sz="1765" b="1"/>
             </a:lvl5pPr>
             <a:lvl6pPr marL="2520315" indent="0">
               <a:buNone/>
-              <a:defRPr sz="1760" b="1"/>
+              <a:defRPr sz="1765" b="1"/>
             </a:lvl6pPr>
-            <a:lvl7pPr marL="3024505" indent="0">
+            <a:lvl7pPr marL="3023870" indent="0">
               <a:buNone/>
-              <a:defRPr sz="1760" b="1"/>
+              <a:defRPr sz="1765" b="1"/>
             </a:lvl7pPr>
             <a:lvl8pPr marL="3528060" indent="0">
               <a:buNone/>
-              <a:defRPr sz="1760" b="1"/>
+              <a:defRPr sz="1765" b="1"/>
             </a:lvl8pPr>
             <a:lvl9pPr marL="4032250" indent="0">
               <a:buNone/>
-              <a:defRPr sz="1760" b="1"/>
+              <a:defRPr sz="1765" b="1"/>
             </a:lvl9pPr>
           </a:lstStyle>
           <a:p>
@@ -1682,8 +1682,8 @@
         </p:nvSpPr>
         <p:spPr>
           <a:xfrm>
-            <a:off x="5155699" y="2725123"/>
-            <a:ext cx="4417080" cy="6460922"/>
+            <a:off x="5155541" y="2530394"/>
+            <a:ext cx="4416945" cy="5999244"/>
           </a:xfrm>
         </p:spPr>
         <p:txBody>
@@ -1845,8 +1845,8 @@
         </p:nvSpPr>
         <p:spPr>
           <a:xfrm>
-            <a:off x="503023" y="894264"/>
-            <a:ext cx="9069301" cy="1037134"/>
+            <a:off x="503008" y="830362"/>
+            <a:ext cx="9069024" cy="963024"/>
           </a:xfrm>
         </p:spPr>
         <p:txBody>
@@ -2073,8 +2073,8 @@
         </p:nvSpPr>
         <p:spPr>
           <a:xfrm>
-            <a:off x="503023" y="2285928"/>
-            <a:ext cx="4326692" cy="6773121"/>
+            <a:off x="503008" y="2122583"/>
+            <a:ext cx="4326560" cy="6289134"/>
           </a:xfrm>
         </p:spPr>
         <p:txBody>
@@ -2084,7 +2084,7 @@
           <a:lstStyle>
             <a:lvl1pPr>
               <a:buNone/>
-              <a:defRPr sz="1760"/>
+              <a:defRPr sz="1765"/>
             </a:lvl1pPr>
           </a:lstStyle>
           <a:p>
@@ -2108,8 +2108,8 @@
         </p:nvSpPr>
         <p:spPr>
           <a:xfrm>
-            <a:off x="5250491" y="2285928"/>
-            <a:ext cx="4321833" cy="6773121"/>
+            <a:off x="5250331" y="2122583"/>
+            <a:ext cx="4321701" cy="6289134"/>
           </a:xfrm>
         </p:spPr>
         <p:txBody>
@@ -2119,7 +2119,7 @@
           <a:lstStyle>
             <a:lvl1pPr>
               <a:buNone/>
-              <a:defRPr sz="1760"/>
+              <a:defRPr sz="1765"/>
             </a:lvl1pPr>
           </a:lstStyle>
           <a:p>
@@ -2269,8 +2269,8 @@
         </p:nvSpPr>
         <p:spPr>
           <a:xfrm>
-            <a:off x="8462101" y="1344041"/>
-            <a:ext cx="863176" cy="7392226"/>
+            <a:off x="8461842" y="1248000"/>
+            <a:ext cx="863150" cy="6864000"/>
           </a:xfrm>
         </p:spPr>
         <p:txBody>
@@ -2280,7 +2280,7 @@
           <a:lstStyle>
             <a:lvl1pPr>
               <a:buNone/>
-              <a:defRPr sz="3090"/>
+              <a:defRPr sz="3085"/>
             </a:lvl1pPr>
           </a:lstStyle>
           <a:p>
@@ -2308,8 +2308,8 @@
         </p:nvSpPr>
         <p:spPr>
           <a:xfrm>
-            <a:off x="756023" y="1344041"/>
-            <a:ext cx="7581067" cy="7392226"/>
+            <a:off x="756000" y="1248000"/>
+            <a:ext cx="7580835" cy="6864000"/>
           </a:xfrm>
         </p:spPr>
         <p:txBody>
@@ -2493,8 +2493,8 @@
         </p:nvSpPr>
         <p:spPr>
           <a:xfrm>
-            <a:off x="503023" y="894264"/>
-            <a:ext cx="9069301" cy="1037134"/>
+            <a:off x="503008" y="830362"/>
+            <a:ext cx="9069024" cy="963024"/>
           </a:xfrm>
           <a:prstGeom prst="rect">
             <a:avLst/>
@@ -2529,8 +2529,8 @@
         </p:nvSpPr>
         <p:spPr>
           <a:xfrm>
-            <a:off x="503023" y="2190681"/>
-            <a:ext cx="9069301" cy="6995364"/>
+            <a:off x="503008" y="2034142"/>
+            <a:ext cx="9069024" cy="6495496"/>
           </a:xfrm>
           <a:prstGeom prst="rect">
             <a:avLst/>
@@ -2598,8 +2598,8 @@
         </p:nvSpPr>
         <p:spPr>
           <a:xfrm>
-            <a:off x="506000" y="9281292"/>
-            <a:ext cx="2232352" cy="465652"/>
+            <a:off x="505984" y="8618079"/>
+            <a:ext cx="2232283" cy="432378"/>
           </a:xfrm>
           <a:prstGeom prst="rect">
             <a:avLst/>
@@ -2611,7 +2611,7 @@
           </a:bodyPr>
           <a:lstStyle>
             <a:lvl1pPr algn="l">
-              <a:defRPr sz="1105" baseline="0">
+              <a:defRPr sz="1100" baseline="0">
                 <a:solidFill>
                   <a:schemeClr val="tx1">
                     <a:tint val="75000"/>
@@ -2643,8 +2643,8 @@
         </p:nvSpPr>
         <p:spPr>
           <a:xfrm>
-            <a:off x="3403096" y="9281292"/>
-            <a:ext cx="3274116" cy="465652"/>
+            <a:off x="3402992" y="8618079"/>
+            <a:ext cx="3274016" cy="432378"/>
           </a:xfrm>
           <a:prstGeom prst="rect">
             <a:avLst/>
@@ -2656,7 +2656,7 @@
           </a:bodyPr>
           <a:lstStyle>
             <a:lvl1pPr algn="ctr">
-              <a:defRPr sz="1105" baseline="0">
+              <a:defRPr sz="1100" baseline="0">
                 <a:solidFill>
                   <a:schemeClr val="tx1">
                     <a:tint val="75000"/>
@@ -2685,8 +2685,8 @@
         </p:nvSpPr>
         <p:spPr>
           <a:xfrm>
-            <a:off x="7339973" y="9281292"/>
-            <a:ext cx="2232352" cy="465652"/>
+            <a:off x="7339748" y="8618079"/>
+            <a:ext cx="2232283" cy="432378"/>
           </a:xfrm>
           <a:prstGeom prst="rect">
             <a:avLst/>
@@ -2698,7 +2698,7 @@
           </a:bodyPr>
           <a:lstStyle>
             <a:lvl1pPr algn="r">
-              <a:defRPr sz="1105" baseline="0">
+              <a:defRPr sz="1100" baseline="0">
                 <a:solidFill>
                   <a:schemeClr val="tx1">
                     <a:tint val="75000"/>
@@ -2736,7 +2736,7 @@
   </p:sldLayoutIdLst>
   <p:txStyles>
     <p:titleStyle>
-      <a:lvl1pPr algn="l" defTabSz="1008380" rtl="0" eaLnBrk="1" fontAlgn="auto" latinLnBrk="0" hangingPunct="1">
+      <a:lvl1pPr algn="l" defTabSz="1007745" rtl="0" eaLnBrk="1" fontAlgn="auto" latinLnBrk="0" hangingPunct="1">
         <a:lnSpc>
           <a:spcPct val="100000"/>
         </a:lnSpc>
@@ -2759,7 +2759,7 @@
       </a:lvl1pPr>
     </p:titleStyle>
     <p:bodyStyle>
-      <a:lvl1pPr marL="252095" indent="-252095" algn="l" defTabSz="1008380" rtl="0" eaLnBrk="1" fontAlgn="auto" latinLnBrk="0" hangingPunct="1">
+      <a:lvl1pPr marL="252095" indent="-252095" algn="l" defTabSz="1007745" rtl="0" eaLnBrk="1" fontAlgn="auto" latinLnBrk="0" hangingPunct="1">
         <a:lnSpc>
           <a:spcPct val="130000"/>
         </a:lnSpc>
@@ -2784,7 +2784,7 @@
           <a:cs typeface="+mn-cs"/>
         </a:defRPr>
       </a:lvl1pPr>
-      <a:lvl2pPr marL="756285" indent="-252095" algn="l" defTabSz="1008380" rtl="0" eaLnBrk="1" fontAlgn="auto" latinLnBrk="0" hangingPunct="1">
+      <a:lvl2pPr marL="756285" indent="-252095" algn="l" defTabSz="1007745" rtl="0" eaLnBrk="1" fontAlgn="auto" latinLnBrk="0" hangingPunct="1">
         <a:lnSpc>
           <a:spcPct val="120000"/>
         </a:lnSpc>
@@ -2802,7 +2802,7 @@
           <a:tab pos="1774190" algn="l"/>
           <a:tab pos="1774190" algn="l"/>
         </a:tabLst>
-        <a:defRPr sz="1760" u="none" strike="noStrike" kern="1200" cap="none" spc="150" normalizeH="0" baseline="0">
+        <a:defRPr sz="1765" u="none" strike="noStrike" kern="1200" cap="none" spc="150" normalizeH="0" baseline="0">
           <a:solidFill>
             <a:schemeClr val="tx1">
               <a:lumMod val="65000"/>
@@ -2815,7 +2815,7 @@
           <a:cs typeface="+mn-cs"/>
         </a:defRPr>
       </a:lvl2pPr>
-      <a:lvl3pPr marL="1259840" indent="-252095" algn="l" defTabSz="1008380" rtl="0" eaLnBrk="1" fontAlgn="auto" latinLnBrk="0" hangingPunct="1">
+      <a:lvl3pPr marL="1259840" indent="-252095" algn="l" defTabSz="1007745" rtl="0" eaLnBrk="1" fontAlgn="auto" latinLnBrk="0" hangingPunct="1">
         <a:lnSpc>
           <a:spcPct val="120000"/>
         </a:lnSpc>
@@ -2827,7 +2827,7 @@
         </a:spcAft>
         <a:buFont typeface="Arial" panose="020B0604020202020204" pitchFamily="34" charset="0"/>
         <a:buChar char="●"/>
-        <a:defRPr sz="1760" u="none" strike="noStrike" kern="1200" cap="none" spc="150" normalizeH="0" baseline="0">
+        <a:defRPr sz="1765" u="none" strike="noStrike" kern="1200" cap="none" spc="150" normalizeH="0" baseline="0">
           <a:solidFill>
             <a:schemeClr val="tx1">
               <a:lumMod val="65000"/>
@@ -2840,7 +2840,7 @@
           <a:cs typeface="+mn-cs"/>
         </a:defRPr>
       </a:lvl3pPr>
-      <a:lvl4pPr marL="1764030" indent="-252095" algn="l" defTabSz="1008380" rtl="0" eaLnBrk="1" fontAlgn="auto" latinLnBrk="0" hangingPunct="1">
+      <a:lvl4pPr marL="1764030" indent="-252095" algn="l" defTabSz="1007745" rtl="0" eaLnBrk="1" fontAlgn="auto" latinLnBrk="0" hangingPunct="1">
         <a:lnSpc>
           <a:spcPct val="120000"/>
         </a:lnSpc>
@@ -2865,7 +2865,7 @@
           <a:cs typeface="+mn-cs"/>
         </a:defRPr>
       </a:lvl4pPr>
-      <a:lvl5pPr marL="2268220" indent="-252095" algn="l" defTabSz="1008380" rtl="0" eaLnBrk="1" fontAlgn="auto" latinLnBrk="0" hangingPunct="1">
+      <a:lvl5pPr marL="2268220" indent="-252095" algn="l" defTabSz="1007745" rtl="0" eaLnBrk="1" fontAlgn="auto" latinLnBrk="0" hangingPunct="1">
         <a:lnSpc>
           <a:spcPct val="120000"/>
         </a:lnSpc>
@@ -2890,7 +2890,7 @@
           <a:cs typeface="+mn-cs"/>
         </a:defRPr>
       </a:lvl5pPr>
-      <a:lvl6pPr marL="2772410" indent="-252095" algn="l" defTabSz="1008380" rtl="0" eaLnBrk="1" latinLnBrk="0" hangingPunct="1">
+      <a:lvl6pPr marL="2771775" indent="-252095" algn="l" defTabSz="1007745" rtl="0" eaLnBrk="1" latinLnBrk="0" hangingPunct="1">
         <a:lnSpc>
           <a:spcPct val="90000"/>
         </a:lnSpc>
@@ -2908,7 +2908,7 @@
           <a:cs typeface="+mn-cs"/>
         </a:defRPr>
       </a:lvl6pPr>
-      <a:lvl7pPr marL="3276600" indent="-252095" algn="l" defTabSz="1008380" rtl="0" eaLnBrk="1" latinLnBrk="0" hangingPunct="1">
+      <a:lvl7pPr marL="3275965" indent="-252095" algn="l" defTabSz="1007745" rtl="0" eaLnBrk="1" latinLnBrk="0" hangingPunct="1">
         <a:lnSpc>
           <a:spcPct val="90000"/>
         </a:lnSpc>
@@ -2926,7 +2926,7 @@
           <a:cs typeface="+mn-cs"/>
         </a:defRPr>
       </a:lvl7pPr>
-      <a:lvl8pPr marL="3780155" indent="-252095" algn="l" defTabSz="1008380" rtl="0" eaLnBrk="1" latinLnBrk="0" hangingPunct="1">
+      <a:lvl8pPr marL="3780155" indent="-252095" algn="l" defTabSz="1007745" rtl="0" eaLnBrk="1" latinLnBrk="0" hangingPunct="1">
         <a:lnSpc>
           <a:spcPct val="90000"/>
         </a:lnSpc>
@@ -2944,7 +2944,7 @@
           <a:cs typeface="+mn-cs"/>
         </a:defRPr>
       </a:lvl8pPr>
-      <a:lvl9pPr marL="4284345" indent="-252095" algn="l" defTabSz="1008380" rtl="0" eaLnBrk="1" latinLnBrk="0" hangingPunct="1">
+      <a:lvl9pPr marL="4283710" indent="-252095" algn="l" defTabSz="1007745" rtl="0" eaLnBrk="1" latinLnBrk="0" hangingPunct="1">
         <a:lnSpc>
           <a:spcPct val="90000"/>
         </a:lnSpc>
@@ -2967,7 +2967,7 @@
       <a:defPPr>
         <a:defRPr lang="zh-CN"/>
       </a:defPPr>
-      <a:lvl1pPr marL="0" algn="l" defTabSz="1008380" rtl="0" eaLnBrk="1" latinLnBrk="0" hangingPunct="1">
+      <a:lvl1pPr marL="0" algn="l" defTabSz="1007745" rtl="0" eaLnBrk="1" latinLnBrk="0" hangingPunct="1">
         <a:defRPr sz="1985" kern="1200">
           <a:solidFill>
             <a:schemeClr val="tx1"/>
@@ -2977,7 +2977,7 @@
           <a:cs typeface="+mn-cs"/>
         </a:defRPr>
       </a:lvl1pPr>
-      <a:lvl2pPr marL="504190" algn="l" defTabSz="1008380" rtl="0" eaLnBrk="1" latinLnBrk="0" hangingPunct="1">
+      <a:lvl2pPr marL="504190" algn="l" defTabSz="1007745" rtl="0" eaLnBrk="1" latinLnBrk="0" hangingPunct="1">
         <a:defRPr sz="1985" kern="1200">
           <a:solidFill>
             <a:schemeClr val="tx1"/>
@@ -2987,7 +2987,7 @@
           <a:cs typeface="+mn-cs"/>
         </a:defRPr>
       </a:lvl2pPr>
-      <a:lvl3pPr marL="1008380" algn="l" defTabSz="1008380" rtl="0" eaLnBrk="1" latinLnBrk="0" hangingPunct="1">
+      <a:lvl3pPr marL="1007745" algn="l" defTabSz="1007745" rtl="0" eaLnBrk="1" latinLnBrk="0" hangingPunct="1">
         <a:defRPr sz="1985" kern="1200">
           <a:solidFill>
             <a:schemeClr val="tx1"/>
@@ -2997,7 +2997,7 @@
           <a:cs typeface="+mn-cs"/>
         </a:defRPr>
       </a:lvl3pPr>
-      <a:lvl4pPr marL="1511935" algn="l" defTabSz="1008380" rtl="0" eaLnBrk="1" latinLnBrk="0" hangingPunct="1">
+      <a:lvl4pPr marL="1511935" algn="l" defTabSz="1007745" rtl="0" eaLnBrk="1" latinLnBrk="0" hangingPunct="1">
         <a:defRPr sz="1985" kern="1200">
           <a:solidFill>
             <a:schemeClr val="tx1"/>
@@ -3007,7 +3007,7 @@
           <a:cs typeface="+mn-cs"/>
         </a:defRPr>
       </a:lvl4pPr>
-      <a:lvl5pPr marL="2016125" algn="l" defTabSz="1008380" rtl="0" eaLnBrk="1" latinLnBrk="0" hangingPunct="1">
+      <a:lvl5pPr marL="2016125" algn="l" defTabSz="1007745" rtl="0" eaLnBrk="1" latinLnBrk="0" hangingPunct="1">
         <a:defRPr sz="1985" kern="1200">
           <a:solidFill>
             <a:schemeClr val="tx1"/>
@@ -3017,7 +3017,7 @@
           <a:cs typeface="+mn-cs"/>
         </a:defRPr>
       </a:lvl5pPr>
-      <a:lvl6pPr marL="2520315" algn="l" defTabSz="1008380" rtl="0" eaLnBrk="1" latinLnBrk="0" hangingPunct="1">
+      <a:lvl6pPr marL="2520315" algn="l" defTabSz="1007745" rtl="0" eaLnBrk="1" latinLnBrk="0" hangingPunct="1">
         <a:defRPr sz="1985" kern="1200">
           <a:solidFill>
             <a:schemeClr val="tx1"/>
@@ -3027,7 +3027,7 @@
           <a:cs typeface="+mn-cs"/>
         </a:defRPr>
       </a:lvl6pPr>
-      <a:lvl7pPr marL="3024505" algn="l" defTabSz="1008380" rtl="0" eaLnBrk="1" latinLnBrk="0" hangingPunct="1">
+      <a:lvl7pPr marL="3023870" algn="l" defTabSz="1007745" rtl="0" eaLnBrk="1" latinLnBrk="0" hangingPunct="1">
         <a:defRPr sz="1985" kern="1200">
           <a:solidFill>
             <a:schemeClr val="tx1"/>
@@ -3037,7 +3037,7 @@
           <a:cs typeface="+mn-cs"/>
         </a:defRPr>
       </a:lvl7pPr>
-      <a:lvl8pPr marL="3528060" algn="l" defTabSz="1008380" rtl="0" eaLnBrk="1" latinLnBrk="0" hangingPunct="1">
+      <a:lvl8pPr marL="3528060" algn="l" defTabSz="1007745" rtl="0" eaLnBrk="1" latinLnBrk="0" hangingPunct="1">
         <a:defRPr sz="1985" kern="1200">
           <a:solidFill>
             <a:schemeClr val="tx1"/>
@@ -3047,7 +3047,7 @@
           <a:cs typeface="+mn-cs"/>
         </a:defRPr>
       </a:lvl8pPr>
-      <a:lvl9pPr marL="4032250" algn="l" defTabSz="1008380" rtl="0" eaLnBrk="1" latinLnBrk="0" hangingPunct="1">
+      <a:lvl9pPr marL="4032250" algn="l" defTabSz="1007745" rtl="0" eaLnBrk="1" latinLnBrk="0" hangingPunct="1">
         <a:defRPr sz="1985" kern="1200">
           <a:solidFill>
             <a:schemeClr val="tx1"/>
@@ -3087,8 +3087,8 @@
         </p:nvSpPr>
         <p:spPr>
           <a:xfrm rot="16200000">
-            <a:off x="57150" y="6350"/>
-            <a:ext cx="9994900" cy="10041890"/>
+            <a:off x="391160" y="-372110"/>
+            <a:ext cx="9258935" cy="10041890"/>
           </a:xfrm>
           <a:prstGeom prst="roundRect">
             <a:avLst>
@@ -3123,6 +3123,7 @@
         </p:style>
         <p:txBody>
           <a:bodyPr rtlCol="0" anchor="ctr"/>
+          <a:lstStyle/>
           <a:p>
             <a:pPr algn="ctr"/>
             <a:endParaRPr lang="zh-CN" altLang="en-US" sz="2235"/>
@@ -3131,14 +3132,14 @@
       </p:sp>
       <p:sp>
         <p:nvSpPr>
-          <p:cNvPr id="25" name="圆角矩形 24"/>
+          <p:cNvPr id="39" name="圆角矩形 38"/>
           <p:cNvSpPr/>
           <p:nvPr/>
         </p:nvSpPr>
         <p:spPr>
           <a:xfrm>
-            <a:off x="1070610" y="5965190"/>
-            <a:ext cx="8764905" cy="2425065"/>
+            <a:off x="1036320" y="158750"/>
+            <a:ext cx="8764905" cy="1687830"/>
           </a:xfrm>
           <a:prstGeom prst="roundRect">
             <a:avLst>
@@ -3173,6 +3174,7 @@
         </p:style>
         <p:txBody>
           <a:bodyPr rtlCol="0" anchor="ctr"/>
+          <a:lstStyle/>
           <a:p>
             <a:pPr algn="ctr"/>
             <a:endParaRPr lang="zh-CN" altLang="en-US">
@@ -3182,6 +3184,81 @@
           </a:p>
         </p:txBody>
       </p:sp>
+      <p:sp>
+        <p:nvSpPr>
+          <p:cNvPr id="41" name="矩形: 圆角 8"/>
+          <p:cNvSpPr/>
+          <p:nvPr/>
+        </p:nvSpPr>
+        <p:spPr>
+          <a:xfrm flipH="1">
+            <a:off x="1230630" y="268605"/>
+            <a:ext cx="3448685" cy="1480820"/>
+          </a:xfrm>
+          <a:prstGeom prst="roundRect">
+            <a:avLst>
+              <a:gd name="adj" fmla="val 6238"/>
+            </a:avLst>
+          </a:prstGeom>
+          <a:solidFill>
+            <a:schemeClr val="bg1"/>
+          </a:solidFill>
+          <a:ln w="19050">
+            <a:solidFill>
+              <a:srgbClr val="2E54A1"/>
+            </a:solidFill>
+            <a:prstDash val="sysDash"/>
+          </a:ln>
+        </p:spPr>
+        <p:style>
+          <a:lnRef idx="2">
+            <a:schemeClr val="accent1">
+              <a:shade val="50000"/>
+            </a:schemeClr>
+          </a:lnRef>
+          <a:fillRef idx="1">
+            <a:schemeClr val="accent1"/>
+          </a:fillRef>
+          <a:effectRef idx="0">
+            <a:schemeClr val="accent1"/>
+          </a:effectRef>
+          <a:fontRef idx="minor">
+            <a:schemeClr val="lt1"/>
+          </a:fontRef>
+        </p:style>
+        <p:txBody>
+          <a:bodyPr rtlCol="0" anchor="ctr"/>
+          <a:lstStyle/>
+          <a:p>
+            <a:pPr algn="ctr"/>
+            <a:endParaRPr lang="zh-CN" altLang="en-US" sz="2235" dirty="0"/>
+          </a:p>
+        </p:txBody>
+      </p:sp>
+      <p:pic>
+        <p:nvPicPr>
+          <p:cNvPr id="118" name="图片 117"/>
+          <p:cNvPicPr>
+            <a:picLocks noChangeAspect="1"/>
+          </p:cNvPicPr>
+          <p:nvPr/>
+        </p:nvPicPr>
+        <p:blipFill>
+          <a:blip r:embed="rId1"/>
+          <a:stretch>
+            <a:fillRect/>
+          </a:stretch>
+        </p:blipFill>
+        <p:spPr>
+          <a:xfrm>
+            <a:off x="1343025" y="175007"/>
+            <a:ext cx="3255010" cy="2167255"/>
+          </a:xfrm>
+          <a:prstGeom prst="rect">
+            <a:avLst/>
+          </a:prstGeom>
+        </p:spPr>
+      </p:pic>
       <p:grpSp>
         <p:nvGrpSpPr>
           <p:cNvPr id="120" name="组合 119"/>
@@ -3190,7 +3267,7 @@
         </p:nvGrpSpPr>
         <p:grpSpPr>
           <a:xfrm>
-            <a:off x="273685" y="1932305"/>
+            <a:off x="239395" y="1921510"/>
             <a:ext cx="9561195" cy="3836670"/>
             <a:chOff x="431" y="3043"/>
             <a:chExt cx="15057" cy="2404"/>
@@ -3237,6 +3314,7 @@
           </p:style>
           <p:txBody>
             <a:bodyPr rtlCol="0" anchor="ctr"/>
+            <a:lstStyle/>
             <a:p>
               <a:pPr algn="ctr"/>
               <a:endParaRPr lang="zh-CN" altLang="en-US">
@@ -3335,14 +3413,14 @@
             </a:fontRef>
           </p:style>
           <p:txBody>
-            <a:bodyPr rtlCol="0" anchor="ctr"/>
+            <a:bodyPr vert="eaVert" rtlCol="0" anchor="ctr"/>
             <a:lstStyle/>
             <a:p>
               <a:pPr algn="ctr">
                 <a:defRPr/>
               </a:pPr>
               <a:r>
-                <a:rPr lang="zh-CN" altLang="en-US" sz="1500" b="1" dirty="0">
+                <a:rPr lang="zh-CN" altLang="en-US" b="1" spc="300" dirty="0">
                   <a:ln w="0"/>
                   <a:solidFill>
                     <a:schemeClr val="bg1"/>
@@ -3357,47 +3435,9 @@
                   <a:latin typeface="微软雅黑" panose="020B0503020204020204" charset="-122"/>
                   <a:ea typeface="微软雅黑" panose="020B0503020204020204" charset="-122"/>
                 </a:rPr>
-                <a:t>检测</a:t>
+                <a:t>检测场景</a:t>
               </a:r>
-              <a:endParaRPr lang="en-US" altLang="zh-CN" sz="1500" b="1" dirty="0">
-                <a:ln w="0"/>
-                <a:solidFill>
-                  <a:schemeClr val="bg1"/>
-                </a:solidFill>
-                <a:effectLst>
-                  <a:outerShdw blurRad="38100" dist="19050" dir="2700000" algn="tl" rotWithShape="0">
-                    <a:prstClr val="black">
-                      <a:alpha val="40000"/>
-                    </a:prstClr>
-                  </a:outerShdw>
-                </a:effectLst>
-                <a:latin typeface="微软雅黑" panose="020B0503020204020204" charset="-122"/>
-                <a:ea typeface="微软雅黑" panose="020B0503020204020204" charset="-122"/>
-              </a:endParaRPr>
-            </a:p>
-            <a:p>
-              <a:pPr algn="ctr">
-                <a:defRPr/>
-              </a:pPr>
-              <a:r>
-                <a:rPr lang="zh-CN" altLang="en-US" sz="1500" b="1" dirty="0">
-                  <a:ln w="0"/>
-                  <a:solidFill>
-                    <a:schemeClr val="bg1"/>
-                  </a:solidFill>
-                  <a:effectLst>
-                    <a:outerShdw blurRad="38100" dist="19050" dir="2700000" algn="tl" rotWithShape="0">
-                      <a:prstClr val="black">
-                        <a:alpha val="40000"/>
-                      </a:prstClr>
-                    </a:outerShdw>
-                  </a:effectLst>
-                  <a:latin typeface="微软雅黑" panose="020B0503020204020204" charset="-122"/>
-                  <a:ea typeface="微软雅黑" panose="020B0503020204020204" charset="-122"/>
-                </a:rPr>
-                <a:t>场景</a:t>
-              </a:r>
-              <a:endParaRPr lang="zh-CN" altLang="en-US" sz="1500" b="1" dirty="0">
+              <a:endParaRPr lang="zh-CN" altLang="en-US" b="1" spc="300" dirty="0">
                 <a:ln w="0"/>
                 <a:solidFill>
                   <a:schemeClr val="bg1"/>
@@ -3418,93 +3458,13 @@
       </p:grpSp>
       <p:sp>
         <p:nvSpPr>
-          <p:cNvPr id="27" name="矩形: 圆角 93"/>
-          <p:cNvSpPr/>
-          <p:nvPr/>
-        </p:nvSpPr>
-        <p:spPr>
-          <a:xfrm>
-            <a:off x="273685" y="5963920"/>
-            <a:ext cx="796925" cy="2428240"/>
-          </a:xfrm>
-          <a:prstGeom prst="roundRect">
-            <a:avLst>
-              <a:gd name="adj" fmla="val 0"/>
-            </a:avLst>
-          </a:prstGeom>
-          <a:solidFill>
-            <a:srgbClr val="2E54A1"/>
-          </a:solidFill>
-          <a:ln w="25400">
-            <a:noFill/>
-          </a:ln>
-        </p:spPr>
-        <p:style>
-          <a:lnRef idx="2">
-            <a:schemeClr val="dk1"/>
-          </a:lnRef>
-          <a:fillRef idx="1">
-            <a:schemeClr val="lt1"/>
-          </a:fillRef>
-          <a:effectRef idx="0">
-            <a:schemeClr val="dk1"/>
-          </a:effectRef>
-          <a:fontRef idx="minor">
-            <a:schemeClr val="dk1"/>
-          </a:fontRef>
-        </p:style>
-        <p:txBody>
-          <a:bodyPr rtlCol="0" anchor="ctr"/>
-          <a:lstStyle/>
-          <a:p>
-            <a:pPr algn="ctr">
-              <a:defRPr/>
-            </a:pPr>
-            <a:r>
-              <a:rPr lang="zh-CN" altLang="en-US" sz="1500" b="1" dirty="0">
-                <a:ln w="0"/>
-                <a:solidFill>
-                  <a:schemeClr val="bg1"/>
-                </a:solidFill>
-                <a:effectLst>
-                  <a:outerShdw blurRad="38100" dist="19050" dir="2700000" algn="tl" rotWithShape="0">
-                    <a:prstClr val="black">
-                      <a:alpha val="40000"/>
-                    </a:prstClr>
-                  </a:outerShdw>
-                </a:effectLst>
-                <a:latin typeface="微软雅黑" panose="020B0503020204020204" charset="-122"/>
-                <a:ea typeface="微软雅黑" panose="020B0503020204020204" charset="-122"/>
-              </a:rPr>
-              <a:t>现状与挑战</a:t>
-            </a:r>
-            <a:endParaRPr lang="zh-CN" altLang="en-US" sz="1500" b="1" dirty="0">
-              <a:ln w="0"/>
-              <a:solidFill>
-                <a:schemeClr val="bg1"/>
-              </a:solidFill>
-              <a:effectLst>
-                <a:outerShdw blurRad="38100" dist="19050" dir="2700000" algn="tl" rotWithShape="0">
-                  <a:prstClr val="black">
-                    <a:alpha val="40000"/>
-                  </a:prstClr>
-                </a:outerShdw>
-              </a:effectLst>
-              <a:latin typeface="微软雅黑" panose="020B0503020204020204" charset="-122"/>
-              <a:ea typeface="微软雅黑" panose="020B0503020204020204" charset="-122"/>
-            </a:endParaRPr>
-          </a:p>
-        </p:txBody>
-      </p:sp>
-      <p:sp>
-        <p:nvSpPr>
           <p:cNvPr id="29" name="矩形: 圆角 93"/>
           <p:cNvSpPr/>
           <p:nvPr/>
         </p:nvSpPr>
         <p:spPr>
           <a:xfrm>
-            <a:off x="273685" y="169545"/>
+            <a:off x="239395" y="158750"/>
             <a:ext cx="796925" cy="1689100"/>
           </a:xfrm>
           <a:prstGeom prst="roundRect">
@@ -3534,14 +3494,14 @@
           </a:fontRef>
         </p:style>
         <p:txBody>
-          <a:bodyPr rtlCol="0" anchor="ctr"/>
+          <a:bodyPr vert="eaVert" rtlCol="0" anchor="ctr"/>
           <a:lstStyle/>
           <a:p>
             <a:pPr algn="ctr">
               <a:defRPr/>
             </a:pPr>
             <a:r>
-              <a:rPr lang="zh-CN" altLang="en-US" sz="1500" b="1" dirty="0">
+              <a:rPr lang="zh-CN" altLang="en-US" b="1" spc="300" dirty="0">
                 <a:ln w="0"/>
                 <a:solidFill>
                   <a:schemeClr val="bg1"/>
@@ -3556,9 +3516,9 @@
                 <a:latin typeface="微软雅黑" panose="020B0503020204020204" charset="-122"/>
                 <a:ea typeface="微软雅黑" panose="020B0503020204020204" charset="-122"/>
               </a:rPr>
-              <a:t>战略</a:t>
-            </a:r>
-            <a:endParaRPr lang="en-US" altLang="zh-CN" sz="1500" b="1" dirty="0">
+              <a:t>战略意义</a:t>
+            </a:r>
+            <a:endParaRPr lang="zh-CN" altLang="en-US" b="1" spc="300" dirty="0">
               <a:ln w="0"/>
               <a:solidFill>
                 <a:schemeClr val="bg1"/>
@@ -3574,148 +3534,6 @@
               <a:ea typeface="微软雅黑" panose="020B0503020204020204" charset="-122"/>
             </a:endParaRPr>
           </a:p>
-          <a:p>
-            <a:pPr algn="ctr">
-              <a:defRPr/>
-            </a:pPr>
-            <a:r>
-              <a:rPr lang="zh-CN" altLang="en-US" sz="1500" b="1" dirty="0">
-                <a:ln w="0"/>
-                <a:solidFill>
-                  <a:schemeClr val="bg1"/>
-                </a:solidFill>
-                <a:effectLst>
-                  <a:outerShdw blurRad="38100" dist="19050" dir="2700000" algn="tl" rotWithShape="0">
-                    <a:prstClr val="black">
-                      <a:alpha val="40000"/>
-                    </a:prstClr>
-                  </a:outerShdw>
-                </a:effectLst>
-                <a:latin typeface="微软雅黑" panose="020B0503020204020204" charset="-122"/>
-                <a:ea typeface="微软雅黑" panose="020B0503020204020204" charset="-122"/>
-              </a:rPr>
-              <a:t>覆盖</a:t>
-            </a:r>
-            <a:endParaRPr lang="zh-CN" altLang="en-US" sz="1500" b="1" dirty="0">
-              <a:ln w="0"/>
-              <a:solidFill>
-                <a:schemeClr val="bg1"/>
-              </a:solidFill>
-              <a:effectLst>
-                <a:outerShdw blurRad="38100" dist="19050" dir="2700000" algn="tl" rotWithShape="0">
-                  <a:prstClr val="black">
-                    <a:alpha val="40000"/>
-                  </a:prstClr>
-                </a:outerShdw>
-              </a:effectLst>
-              <a:latin typeface="微软雅黑" panose="020B0503020204020204" charset="-122"/>
-              <a:ea typeface="微软雅黑" panose="020B0503020204020204" charset="-122"/>
-            </a:endParaRPr>
-          </a:p>
-        </p:txBody>
-      </p:sp>
-      <p:sp>
-        <p:nvSpPr>
-          <p:cNvPr id="39" name="圆角矩形 38"/>
-          <p:cNvSpPr/>
-          <p:nvPr/>
-        </p:nvSpPr>
-        <p:spPr>
-          <a:xfrm>
-            <a:off x="1070610" y="169545"/>
-            <a:ext cx="8764905" cy="1687830"/>
-          </a:xfrm>
-          <a:prstGeom prst="roundRect">
-            <a:avLst>
-              <a:gd name="adj" fmla="val 0"/>
-            </a:avLst>
-          </a:prstGeom>
-          <a:solidFill>
-            <a:schemeClr val="accent1">
-              <a:lumMod val="20000"/>
-              <a:lumOff val="80000"/>
-            </a:schemeClr>
-          </a:solidFill>
-          <a:ln>
-            <a:noFill/>
-          </a:ln>
-        </p:spPr>
-        <p:style>
-          <a:lnRef idx="2">
-            <a:schemeClr val="accent1">
-              <a:lumMod val="75000"/>
-            </a:schemeClr>
-          </a:lnRef>
-          <a:fillRef idx="1">
-            <a:schemeClr val="accent1"/>
-          </a:fillRef>
-          <a:effectRef idx="0">
-            <a:srgbClr val="FFFFFF"/>
-          </a:effectRef>
-          <a:fontRef idx="minor">
-            <a:schemeClr val="lt1"/>
-          </a:fontRef>
-        </p:style>
-        <p:txBody>
-          <a:bodyPr rtlCol="0" anchor="ctr"/>
-          <a:p>
-            <a:pPr algn="ctr"/>
-            <a:endParaRPr lang="zh-CN" altLang="en-US">
-              <a:latin typeface="微软雅黑" panose="020B0503020204020204" charset="-122"/>
-              <a:ea typeface="微软雅黑" panose="020B0503020204020204" charset="-122"/>
-            </a:endParaRPr>
-          </a:p>
-        </p:txBody>
-      </p:sp>
-      <p:sp>
-        <p:nvSpPr>
-          <p:cNvPr id="41" name="矩形: 圆角 8"/>
-          <p:cNvSpPr/>
-          <p:nvPr/>
-        </p:nvSpPr>
-        <p:spPr>
-          <a:xfrm flipH="1">
-            <a:off x="1264920" y="279400"/>
-            <a:ext cx="3448685" cy="1480820"/>
-          </a:xfrm>
-          <a:prstGeom prst="roundRect">
-            <a:avLst>
-              <a:gd name="adj" fmla="val 6238"/>
-            </a:avLst>
-          </a:prstGeom>
-          <a:solidFill>
-            <a:schemeClr val="bg1"/>
-          </a:solidFill>
-          <a:ln w="19050">
-            <a:solidFill>
-              <a:srgbClr val="2E54A1"/>
-            </a:solidFill>
-            <a:prstDash val="sysDash"/>
-          </a:ln>
-        </p:spPr>
-        <p:style>
-          <a:lnRef idx="2">
-            <a:schemeClr val="accent1">
-              <a:shade val="50000"/>
-            </a:schemeClr>
-          </a:lnRef>
-          <a:fillRef idx="1">
-            <a:schemeClr val="accent1"/>
-          </a:fillRef>
-          <a:effectRef idx="0">
-            <a:schemeClr val="accent1"/>
-          </a:effectRef>
-          <a:fontRef idx="minor">
-            <a:schemeClr val="lt1"/>
-          </a:fontRef>
-        </p:style>
-        <p:txBody>
-          <a:bodyPr rtlCol="0" anchor="ctr"/>
-          <a:lstStyle/>
-          <a:p>
-            <a:pPr algn="ctr"/>
-            <a:endParaRPr lang="zh-CN" altLang="en-US" sz="2235" dirty="0"/>
-          </a:p>
         </p:txBody>
       </p:sp>
       <p:sp>
@@ -3726,7 +3544,7 @@
         </p:nvSpPr>
         <p:spPr>
           <a:xfrm flipH="1">
-            <a:off x="4907915" y="279400"/>
+            <a:off x="4873625" y="268605"/>
             <a:ext cx="4724400" cy="1480820"/>
           </a:xfrm>
           <a:prstGeom prst="roundRect">
@@ -3777,8 +3595,8 @@
         </p:nvSpPr>
         <p:spPr>
           <a:xfrm>
-            <a:off x="1667193" y="337820"/>
-            <a:ext cx="2644140" cy="297180"/>
+            <a:off x="1632903" y="327025"/>
+            <a:ext cx="2644140" cy="338554"/>
           </a:xfrm>
           <a:prstGeom prst="rect">
             <a:avLst/>
@@ -3793,7 +3611,7 @@
           <a:p>
             <a:pPr algn="ctr"/>
             <a:r>
-              <a:rPr kumimoji="1" lang="zh-CN" altLang="en-US" sz="1335" b="1" dirty="0">
+              <a:rPr kumimoji="1" lang="zh-CN" altLang="en-US" sz="1600" b="1" spc="300" dirty="0">
                 <a:solidFill>
                   <a:srgbClr val="2E54A1"/>
                 </a:solidFill>
@@ -3802,7 +3620,7 @@
               </a:rPr>
               <a:t>国际竞争</a:t>
             </a:r>
-            <a:endParaRPr kumimoji="1" lang="zh-CN" altLang="en-US" sz="1335" b="1" dirty="0">
+            <a:endParaRPr kumimoji="1" lang="zh-CN" altLang="en-US" sz="1600" b="1" spc="300" dirty="0">
               <a:solidFill>
                 <a:srgbClr val="2E54A1"/>
               </a:solidFill>
@@ -3821,7 +3639,7 @@
           <p:nvPr/>
         </p:nvPicPr>
         <p:blipFill rotWithShape="1">
-          <a:blip r:embed="rId1" cstate="print">
+          <a:blip r:embed="rId2" cstate="print">
             <a:extLst>
               <a:ext uri="{28A0092B-C50C-407E-A947-70E740481C1C}">
                 <a14:useLocalDpi xmlns:a14="http://schemas.microsoft.com/office/drawing/2010/main" val="0"/>
@@ -3835,7 +3653,7 @@
         </p:blipFill>
         <p:spPr>
           <a:xfrm>
-            <a:off x="5054600" y="650875"/>
+            <a:off x="5020310" y="640080"/>
             <a:ext cx="2736850" cy="1054100"/>
           </a:xfrm>
           <a:prstGeom prst="rect">
@@ -3852,7 +3670,7 @@
           <p:nvPr/>
         </p:nvPicPr>
         <p:blipFill>
-          <a:blip r:embed="rId2">
+          <a:blip r:embed="rId3">
             <a:extLst>
               <a:ext uri="{28A0092B-C50C-407E-A947-70E740481C1C}">
                 <a14:useLocalDpi xmlns:a14="http://schemas.microsoft.com/office/drawing/2010/main" val="0"/>
@@ -3866,8 +3684,8 @@
         </p:blipFill>
         <p:spPr bwMode="auto">
           <a:xfrm>
-            <a:off x="7957820" y="650875"/>
-            <a:ext cx="1567180" cy="1022985"/>
+            <a:off x="7923530" y="388050"/>
+            <a:ext cx="1567180" cy="1275015"/>
           </a:xfrm>
           <a:prstGeom prst="rect">
             <a:avLst/>
@@ -3892,8 +3710,8 @@
         </p:nvSpPr>
         <p:spPr>
           <a:xfrm>
-            <a:off x="5223510" y="1487805"/>
-            <a:ext cx="554990" cy="229870"/>
+            <a:off x="5180648" y="1467754"/>
+            <a:ext cx="554990" cy="261610"/>
           </a:xfrm>
           <a:prstGeom prst="rect">
             <a:avLst/>
@@ -3907,7 +3725,7 @@
           <a:lstStyle/>
           <a:p>
             <a:r>
-              <a:rPr lang="en-US" altLang="zh-CN" sz="900" b="1" dirty="0">
+              <a:rPr lang="en-US" altLang="zh-CN" sz="1100" b="1" dirty="0">
                 <a:solidFill>
                   <a:schemeClr val="bg1"/>
                 </a:solidFill>
@@ -3916,7 +3734,7 @@
               </a:rPr>
               <a:t>2021</a:t>
             </a:r>
-            <a:endParaRPr lang="en-US" altLang="zh-CN" sz="900" b="1" dirty="0">
+            <a:endParaRPr lang="en-US" altLang="zh-CN" sz="1100" b="1" dirty="0">
               <a:solidFill>
                 <a:schemeClr val="bg1"/>
               </a:solidFill>
@@ -3934,8 +3752,8 @@
         </p:nvSpPr>
         <p:spPr>
           <a:xfrm>
-            <a:off x="5959475" y="1342390"/>
-            <a:ext cx="544195" cy="229870"/>
+            <a:off x="5926455" y="1304994"/>
+            <a:ext cx="544195" cy="261610"/>
           </a:xfrm>
           <a:prstGeom prst="rect">
             <a:avLst/>
@@ -3949,7 +3767,7 @@
           <a:lstStyle/>
           <a:p>
             <a:r>
-              <a:rPr lang="en-US" altLang="zh-CN" sz="900" b="1" dirty="0">
+              <a:rPr lang="en-US" altLang="zh-CN" sz="1100" b="1" dirty="0">
                 <a:solidFill>
                   <a:schemeClr val="bg1"/>
                 </a:solidFill>
@@ -3958,7 +3776,7 @@
               </a:rPr>
               <a:t>2023</a:t>
             </a:r>
-            <a:endParaRPr lang="en-US" altLang="zh-CN" sz="900" b="1" dirty="0">
+            <a:endParaRPr lang="en-US" altLang="zh-CN" sz="1100" b="1" dirty="0">
               <a:solidFill>
                 <a:schemeClr val="bg1"/>
               </a:solidFill>
@@ -3976,8 +3794,8 @@
         </p:nvSpPr>
         <p:spPr>
           <a:xfrm>
-            <a:off x="6647815" y="1070610"/>
-            <a:ext cx="561975" cy="229870"/>
+            <a:off x="6613525" y="1059815"/>
+            <a:ext cx="561975" cy="261610"/>
           </a:xfrm>
           <a:prstGeom prst="rect">
             <a:avLst/>
@@ -3991,7 +3809,7 @@
           <a:lstStyle/>
           <a:p>
             <a:r>
-              <a:rPr lang="en-US" altLang="zh-CN" sz="900" b="1" dirty="0">
+              <a:rPr lang="en-US" altLang="zh-CN" sz="1100" b="1" dirty="0">
                 <a:solidFill>
                   <a:schemeClr val="bg1"/>
                 </a:solidFill>
@@ -4000,7 +3818,7 @@
               </a:rPr>
               <a:t>2025</a:t>
             </a:r>
-            <a:endParaRPr lang="en-US" altLang="zh-CN" sz="900" b="1" dirty="0">
+            <a:endParaRPr lang="en-US" altLang="zh-CN" sz="1100" b="1" dirty="0">
               <a:solidFill>
                 <a:schemeClr val="bg1"/>
               </a:solidFill>
@@ -4018,8 +3836,8 @@
         </p:nvSpPr>
         <p:spPr>
           <a:xfrm>
-            <a:off x="7209790" y="778510"/>
-            <a:ext cx="506730" cy="229870"/>
+            <a:off x="7146290" y="731892"/>
+            <a:ext cx="588962" cy="261610"/>
           </a:xfrm>
           <a:prstGeom prst="rect">
             <a:avLst/>
@@ -4033,7 +3851,7 @@
           <a:lstStyle/>
           <a:p>
             <a:r>
-              <a:rPr lang="en-US" altLang="zh-CN" sz="900" b="1" dirty="0">
+              <a:rPr lang="en-US" altLang="zh-CN" sz="1100" b="1" dirty="0">
                 <a:solidFill>
                   <a:schemeClr val="bg1"/>
                 </a:solidFill>
@@ -4042,7 +3860,7 @@
               </a:rPr>
               <a:t>2026</a:t>
             </a:r>
-            <a:endParaRPr lang="en-US" altLang="zh-CN" sz="900" b="1" dirty="0">
+            <a:endParaRPr lang="en-US" altLang="zh-CN" sz="1100" b="1" dirty="0">
               <a:solidFill>
                 <a:schemeClr val="bg1"/>
               </a:solidFill>
@@ -4060,8 +3878,8 @@
         </p:nvSpPr>
         <p:spPr>
           <a:xfrm>
-            <a:off x="5012055" y="1057910"/>
-            <a:ext cx="679450" cy="450215"/>
+            <a:off x="4961890" y="910590"/>
+            <a:ext cx="744220" cy="523220"/>
           </a:xfrm>
           <a:prstGeom prst="rect">
             <a:avLst/>
@@ -4075,13 +3893,13 @@
           <a:lstStyle/>
           <a:p>
             <a:r>
-              <a:rPr lang="zh-CN" altLang="en-US" sz="1165" b="1" dirty="0">
+              <a:rPr lang="zh-CN" altLang="en-US" sz="1400" b="1" dirty="0">
                 <a:latin typeface="微软雅黑" panose="020B0503020204020204" charset="-122"/>
                 <a:ea typeface="微软雅黑" panose="020B0503020204020204" charset="-122"/>
               </a:rPr>
               <a:t>十四五</a:t>
             </a:r>
-            <a:endParaRPr lang="en-US" altLang="zh-CN" sz="1165" b="1" dirty="0">
+            <a:endParaRPr lang="en-US" altLang="zh-CN" sz="1400" b="1" dirty="0">
               <a:latin typeface="微软雅黑" panose="020B0503020204020204" charset="-122"/>
               <a:ea typeface="微软雅黑" panose="020B0503020204020204" charset="-122"/>
             </a:endParaRPr>
@@ -4089,13 +3907,13 @@
           <a:p>
             <a:pPr algn="ctr"/>
             <a:r>
-              <a:rPr lang="zh-CN" altLang="en-US" sz="1165" b="1" dirty="0">
+              <a:rPr lang="zh-CN" altLang="en-US" sz="1400" b="1" dirty="0">
                 <a:latin typeface="微软雅黑" panose="020B0503020204020204" charset="-122"/>
                 <a:ea typeface="微软雅黑" panose="020B0503020204020204" charset="-122"/>
               </a:rPr>
               <a:t>规划</a:t>
             </a:r>
-            <a:endParaRPr lang="zh-CN" altLang="en-US" sz="1165" b="1" dirty="0">
+            <a:endParaRPr lang="zh-CN" altLang="en-US" sz="1400" b="1" dirty="0">
               <a:latin typeface="微软雅黑" panose="020B0503020204020204" charset="-122"/>
               <a:ea typeface="微软雅黑" panose="020B0503020204020204" charset="-122"/>
             </a:endParaRPr>
@@ -4110,8 +3928,8 @@
         </p:nvSpPr>
         <p:spPr>
           <a:xfrm>
-            <a:off x="5693410" y="894080"/>
-            <a:ext cx="959485" cy="450215"/>
+            <a:off x="5596890" y="749915"/>
+            <a:ext cx="959485" cy="523220"/>
           </a:xfrm>
           <a:prstGeom prst="rect">
             <a:avLst/>
@@ -4126,13 +3944,13 @@
           <a:p>
             <a:pPr algn="ctr"/>
             <a:r>
-              <a:rPr lang="zh-CN" altLang="en-US" sz="1165" b="1" dirty="0">
+              <a:rPr lang="zh-CN" altLang="en-US" sz="1400" b="1" dirty="0">
                 <a:latin typeface="微软雅黑" panose="020B0503020204020204" charset="-122"/>
                 <a:ea typeface="微软雅黑" panose="020B0503020204020204" charset="-122"/>
               </a:rPr>
               <a:t>海洋科技</a:t>
             </a:r>
-            <a:endParaRPr lang="zh-CN" altLang="en-US" sz="1165" b="1" dirty="0">
+            <a:endParaRPr lang="zh-CN" altLang="en-US" sz="1400" b="1" dirty="0">
               <a:latin typeface="微软雅黑" panose="020B0503020204020204" charset="-122"/>
               <a:ea typeface="微软雅黑" panose="020B0503020204020204" charset="-122"/>
             </a:endParaRPr>
@@ -4140,13 +3958,13 @@
           <a:p>
             <a:pPr algn="ctr"/>
             <a:r>
-              <a:rPr lang="zh-CN" altLang="en-US" sz="1165" b="1" dirty="0">
+              <a:rPr lang="zh-CN" altLang="en-US" sz="1400" b="1" dirty="0">
                 <a:latin typeface="微软雅黑" panose="020B0503020204020204" charset="-122"/>
                 <a:ea typeface="微软雅黑" panose="020B0503020204020204" charset="-122"/>
               </a:rPr>
               <a:t>创新</a:t>
             </a:r>
-            <a:endParaRPr lang="zh-CN" altLang="en-US" sz="1165" b="1" dirty="0">
+            <a:endParaRPr lang="zh-CN" altLang="en-US" sz="1400" b="1" dirty="0">
               <a:latin typeface="微软雅黑" panose="020B0503020204020204" charset="-122"/>
               <a:ea typeface="微软雅黑" panose="020B0503020204020204" charset="-122"/>
             </a:endParaRPr>
@@ -4161,8 +3979,8 @@
         </p:nvSpPr>
         <p:spPr>
           <a:xfrm>
-            <a:off x="6784340" y="1367790"/>
-            <a:ext cx="901700" cy="270510"/>
+            <a:off x="6527800" y="1356995"/>
+            <a:ext cx="1123950" cy="307777"/>
           </a:xfrm>
           <a:prstGeom prst="rect">
             <a:avLst/>
@@ -4176,20 +3994,20 @@
           <a:lstStyle/>
           <a:p>
             <a:r>
-              <a:rPr lang="zh-CN" altLang="en-US" sz="1165" b="1" dirty="0">
+              <a:rPr lang="zh-CN" altLang="en-US" sz="1400" b="1" dirty="0">
                 <a:latin typeface="微软雅黑" panose="020B0503020204020204" charset="-122"/>
                 <a:ea typeface="微软雅黑" panose="020B0503020204020204" charset="-122"/>
               </a:rPr>
               <a:t>人工智能</a:t>
             </a:r>
             <a:r>
-              <a:rPr lang="en-US" altLang="zh-CN" sz="1165" b="1" dirty="0">
+              <a:rPr lang="en-US" altLang="zh-CN" sz="1400" b="1" dirty="0">
                 <a:latin typeface="微软雅黑" panose="020B0503020204020204" charset="-122"/>
                 <a:ea typeface="微软雅黑" panose="020B0503020204020204" charset="-122"/>
               </a:rPr>
               <a:t>+</a:t>
             </a:r>
-            <a:endParaRPr lang="zh-CN" altLang="en-US" sz="1165" b="1" dirty="0">
+            <a:endParaRPr lang="zh-CN" altLang="en-US" sz="1400" b="1" dirty="0">
               <a:latin typeface="微软雅黑" panose="020B0503020204020204" charset="-122"/>
               <a:ea typeface="微软雅黑" panose="020B0503020204020204" charset="-122"/>
             </a:endParaRPr>
@@ -4204,8 +4022,8 @@
         </p:nvSpPr>
         <p:spPr>
           <a:xfrm>
-            <a:off x="7437755" y="988060"/>
-            <a:ext cx="702945" cy="450215"/>
+            <a:off x="7306628" y="965076"/>
+            <a:ext cx="930275" cy="523220"/>
           </a:xfrm>
           <a:prstGeom prst="rect">
             <a:avLst/>
@@ -4219,13 +4037,13 @@
           <a:lstStyle/>
           <a:p>
             <a:r>
-              <a:rPr lang="zh-CN" altLang="en-US" sz="1165" b="1" dirty="0">
+              <a:rPr lang="zh-CN" altLang="en-US" sz="1400" b="1" dirty="0">
                 <a:latin typeface="微软雅黑" panose="020B0503020204020204" charset="-122"/>
                 <a:ea typeface="微软雅黑" panose="020B0503020204020204" charset="-122"/>
               </a:rPr>
               <a:t>十五五</a:t>
             </a:r>
-            <a:endParaRPr lang="en-US" altLang="zh-CN" sz="1165" b="1" dirty="0">
+            <a:endParaRPr lang="en-US" altLang="zh-CN" sz="1400" b="1" dirty="0">
               <a:latin typeface="微软雅黑" panose="020B0503020204020204" charset="-122"/>
               <a:ea typeface="微软雅黑" panose="020B0503020204020204" charset="-122"/>
             </a:endParaRPr>
@@ -4233,13 +4051,13 @@
           <a:p>
             <a:pPr algn="ctr"/>
             <a:r>
-              <a:rPr lang="zh-CN" altLang="en-US" sz="1165" b="1" dirty="0">
+              <a:rPr lang="zh-CN" altLang="en-US" sz="1400" b="1" dirty="0">
                 <a:latin typeface="微软雅黑" panose="020B0503020204020204" charset="-122"/>
                 <a:ea typeface="微软雅黑" panose="020B0503020204020204" charset="-122"/>
               </a:rPr>
               <a:t>规划</a:t>
             </a:r>
-            <a:endParaRPr lang="zh-CN" altLang="en-US" sz="1165" b="1" dirty="0">
+            <a:endParaRPr lang="zh-CN" altLang="en-US" sz="1400" b="1" dirty="0">
               <a:latin typeface="微软雅黑" panose="020B0503020204020204" charset="-122"/>
               <a:ea typeface="微软雅黑" panose="020B0503020204020204" charset="-122"/>
             </a:endParaRPr>
@@ -4254,8 +4072,8 @@
         </p:nvSpPr>
         <p:spPr>
           <a:xfrm>
-            <a:off x="8236585" y="691515"/>
-            <a:ext cx="1026160" cy="892175"/>
+            <a:off x="8244205" y="363468"/>
+            <a:ext cx="1049973" cy="1141730"/>
           </a:xfrm>
           <a:prstGeom prst="rect">
             <a:avLst/>
@@ -4269,13 +4087,13 @@
           <a:lstStyle/>
           <a:p>
             <a:r>
-              <a:rPr lang="zh-CN" altLang="en-US" sz="1200" b="1" dirty="0">
+              <a:rPr lang="zh-CN" altLang="en-US" sz="1400" b="1" dirty="0">
                 <a:latin typeface="微软雅黑" panose="020B0503020204020204" charset="-122"/>
                 <a:ea typeface="微软雅黑" panose="020B0503020204020204" charset="-122"/>
               </a:rPr>
               <a:t>复杂海域态势感知与无人化执法需求提升</a:t>
             </a:r>
-            <a:endParaRPr lang="zh-CN" altLang="en-US" sz="1200" b="1" dirty="0">
+            <a:endParaRPr lang="zh-CN" altLang="en-US" sz="1400" b="1" dirty="0">
               <a:latin typeface="微软雅黑" panose="020B0503020204020204" charset="-122"/>
               <a:ea typeface="微软雅黑" panose="020B0503020204020204" charset="-122"/>
             </a:endParaRPr>
@@ -4290,8 +4108,8 @@
         </p:nvSpPr>
         <p:spPr>
           <a:xfrm>
-            <a:off x="6459220" y="337820"/>
-            <a:ext cx="1621790" cy="297180"/>
+            <a:off x="6424929" y="327025"/>
+            <a:ext cx="1857007" cy="338554"/>
           </a:xfrm>
           <a:prstGeom prst="rect">
             <a:avLst/>
@@ -4306,7 +4124,7 @@
           <a:p>
             <a:pPr algn="ctr"/>
             <a:r>
-              <a:rPr kumimoji="1" lang="zh-CN" altLang="en-US" sz="1335" b="1" dirty="0">
+              <a:rPr kumimoji="1" lang="zh-CN" altLang="en-US" sz="1600" b="1" spc="300" dirty="0">
                 <a:solidFill>
                   <a:srgbClr val="2E54A1"/>
                 </a:solidFill>
@@ -4315,289 +4133,7 @@
               </a:rPr>
               <a:t>国家政策演进</a:t>
             </a:r>
-            <a:endParaRPr kumimoji="1" lang="zh-CN" altLang="en-US" sz="1335" b="1" dirty="0">
-              <a:solidFill>
-                <a:srgbClr val="2E54A1"/>
-              </a:solidFill>
-              <a:latin typeface="微软雅黑" panose="020B0503020204020204" charset="-122"/>
-              <a:ea typeface="微软雅黑" panose="020B0503020204020204" charset="-122"/>
-            </a:endParaRPr>
-          </a:p>
-        </p:txBody>
-      </p:sp>
-      <p:sp>
-        <p:nvSpPr>
-          <p:cNvPr id="72" name="矩形: 圆角 8"/>
-          <p:cNvSpPr/>
-          <p:nvPr/>
-        </p:nvSpPr>
-        <p:spPr>
-          <a:xfrm flipH="1">
-            <a:off x="1219200" y="6103620"/>
-            <a:ext cx="2520315" cy="2148205"/>
-          </a:xfrm>
-          <a:prstGeom prst="roundRect">
-            <a:avLst>
-              <a:gd name="adj" fmla="val 6238"/>
-            </a:avLst>
-          </a:prstGeom>
-          <a:solidFill>
-            <a:schemeClr val="bg1"/>
-          </a:solidFill>
-          <a:ln w="19050">
-            <a:solidFill>
-              <a:srgbClr val="2E54A1"/>
-            </a:solidFill>
-            <a:prstDash val="sysDash"/>
-          </a:ln>
-        </p:spPr>
-        <p:style>
-          <a:lnRef idx="2">
-            <a:schemeClr val="accent1">
-              <a:shade val="50000"/>
-            </a:schemeClr>
-          </a:lnRef>
-          <a:fillRef idx="1">
-            <a:schemeClr val="accent1"/>
-          </a:fillRef>
-          <a:effectRef idx="0">
-            <a:schemeClr val="accent1"/>
-          </a:effectRef>
-          <a:fontRef idx="minor">
-            <a:schemeClr val="lt1"/>
-          </a:fontRef>
-        </p:style>
-        <p:txBody>
-          <a:bodyPr rtlCol="0" anchor="ctr"/>
-          <a:lstStyle/>
-          <a:p>
-            <a:pPr algn="ctr"/>
-            <a:endParaRPr lang="zh-CN" altLang="en-US" sz="2235" dirty="0"/>
-          </a:p>
-        </p:txBody>
-      </p:sp>
-      <p:sp>
-        <p:nvSpPr>
-          <p:cNvPr id="73" name="矩形: 圆角 8"/>
-          <p:cNvSpPr/>
-          <p:nvPr/>
-        </p:nvSpPr>
-        <p:spPr>
-          <a:xfrm flipH="1">
-            <a:off x="4191635" y="6104890"/>
-            <a:ext cx="2520315" cy="2145665"/>
-          </a:xfrm>
-          <a:prstGeom prst="roundRect">
-            <a:avLst>
-              <a:gd name="adj" fmla="val 6238"/>
-            </a:avLst>
-          </a:prstGeom>
-          <a:solidFill>
-            <a:schemeClr val="bg1"/>
-          </a:solidFill>
-          <a:ln w="19050">
-            <a:solidFill>
-              <a:srgbClr val="2E54A1"/>
-            </a:solidFill>
-            <a:prstDash val="sysDash"/>
-          </a:ln>
-        </p:spPr>
-        <p:style>
-          <a:lnRef idx="2">
-            <a:schemeClr val="accent1">
-              <a:shade val="50000"/>
-            </a:schemeClr>
-          </a:lnRef>
-          <a:fillRef idx="1">
-            <a:schemeClr val="accent1"/>
-          </a:fillRef>
-          <a:effectRef idx="0">
-            <a:schemeClr val="accent1"/>
-          </a:effectRef>
-          <a:fontRef idx="minor">
-            <a:schemeClr val="lt1"/>
-          </a:fontRef>
-        </p:style>
-        <p:txBody>
-          <a:bodyPr rtlCol="0" anchor="ctr"/>
-          <a:lstStyle/>
-          <a:p>
-            <a:pPr algn="ctr"/>
-            <a:endParaRPr lang="zh-CN" altLang="en-US" sz="2235" dirty="0"/>
-          </a:p>
-        </p:txBody>
-      </p:sp>
-      <p:sp>
-        <p:nvSpPr>
-          <p:cNvPr id="76" name="矩形: 圆角 8"/>
-          <p:cNvSpPr/>
-          <p:nvPr/>
-        </p:nvSpPr>
-        <p:spPr>
-          <a:xfrm flipH="1">
-            <a:off x="7164070" y="6109335"/>
-            <a:ext cx="2520315" cy="2136775"/>
-          </a:xfrm>
-          <a:prstGeom prst="roundRect">
-            <a:avLst>
-              <a:gd name="adj" fmla="val 6238"/>
-            </a:avLst>
-          </a:prstGeom>
-          <a:solidFill>
-            <a:schemeClr val="bg1"/>
-          </a:solidFill>
-          <a:ln w="19050">
-            <a:solidFill>
-              <a:srgbClr val="2E54A1"/>
-            </a:solidFill>
-            <a:prstDash val="sysDash"/>
-          </a:ln>
-        </p:spPr>
-        <p:style>
-          <a:lnRef idx="2">
-            <a:schemeClr val="accent1">
-              <a:shade val="50000"/>
-            </a:schemeClr>
-          </a:lnRef>
-          <a:fillRef idx="1">
-            <a:schemeClr val="accent1"/>
-          </a:fillRef>
-          <a:effectRef idx="0">
-            <a:schemeClr val="accent1"/>
-          </a:effectRef>
-          <a:fontRef idx="minor">
-            <a:schemeClr val="lt1"/>
-          </a:fontRef>
-        </p:style>
-        <p:txBody>
-          <a:bodyPr rtlCol="0" anchor="ctr"/>
-          <a:lstStyle/>
-          <a:p>
-            <a:pPr algn="ctr"/>
-            <a:endParaRPr lang="zh-CN" altLang="en-US" sz="2235" dirty="0"/>
-          </a:p>
-        </p:txBody>
-      </p:sp>
-      <p:sp>
-        <p:nvSpPr>
-          <p:cNvPr id="77" name="文本框 76"/>
-          <p:cNvSpPr txBox="1"/>
-          <p:nvPr/>
-        </p:nvSpPr>
-        <p:spPr>
-          <a:xfrm>
-            <a:off x="1224915" y="6154738"/>
-            <a:ext cx="2508885" cy="297180"/>
-          </a:xfrm>
-          <a:prstGeom prst="rect">
-            <a:avLst/>
-          </a:prstGeom>
-          <a:noFill/>
-        </p:spPr>
-        <p:txBody>
-          <a:bodyPr wrap="square" rtlCol="0">
-            <a:spAutoFit/>
-          </a:bodyPr>
-          <a:lstStyle/>
-          <a:p>
-            <a:pPr algn="ctr"/>
-            <a:r>
-              <a:rPr kumimoji="1" lang="zh-CN" altLang="en-US" sz="1335" b="1" dirty="0">
-                <a:solidFill>
-                  <a:srgbClr val="2E54A1"/>
-                </a:solidFill>
-                <a:latin typeface="微软雅黑" panose="020B0503020204020204" charset="-122"/>
-                <a:ea typeface="微软雅黑" panose="020B0503020204020204" charset="-122"/>
-              </a:rPr>
-              <a:t>海杂波下微弱信号难感知</a:t>
-            </a:r>
-            <a:endParaRPr kumimoji="1" lang="zh-CN" altLang="en-US" sz="1335" b="1" dirty="0">
-              <a:solidFill>
-                <a:srgbClr val="2E54A1"/>
-              </a:solidFill>
-              <a:latin typeface="微软雅黑" panose="020B0503020204020204" charset="-122"/>
-              <a:ea typeface="微软雅黑" panose="020B0503020204020204" charset="-122"/>
-            </a:endParaRPr>
-          </a:p>
-        </p:txBody>
-      </p:sp>
-      <p:sp>
-        <p:nvSpPr>
-          <p:cNvPr id="88" name="文本框 87"/>
-          <p:cNvSpPr txBox="1"/>
-          <p:nvPr/>
-        </p:nvSpPr>
-        <p:spPr>
-          <a:xfrm>
-            <a:off x="4191635" y="6123940"/>
-            <a:ext cx="2423795" cy="358775"/>
-          </a:xfrm>
-          <a:prstGeom prst="rect">
-            <a:avLst/>
-          </a:prstGeom>
-          <a:noFill/>
-        </p:spPr>
-        <p:txBody>
-          <a:bodyPr wrap="square" rtlCol="0">
-            <a:noAutofit/>
-          </a:bodyPr>
-          <a:lstStyle/>
-          <a:p>
-            <a:pPr algn="ctr"/>
-            <a:r>
-              <a:rPr kumimoji="1" lang="zh-CN" altLang="en-US" sz="1335" b="1" dirty="0">
-                <a:solidFill>
-                  <a:srgbClr val="2E54A1"/>
-                </a:solidFill>
-                <a:latin typeface="微软雅黑" panose="020B0503020204020204" charset="-122"/>
-                <a:ea typeface="微软雅黑" panose="020B0503020204020204" charset="-122"/>
-              </a:rPr>
-              <a:t>海量频谱数据流难管理</a:t>
-            </a:r>
-            <a:endParaRPr kumimoji="1" lang="zh-CN" altLang="en-US" sz="1335" b="1" dirty="0">
-              <a:solidFill>
-                <a:srgbClr val="2E54A1"/>
-              </a:solidFill>
-              <a:latin typeface="微软雅黑" panose="020B0503020204020204" charset="-122"/>
-              <a:ea typeface="微软雅黑" panose="020B0503020204020204" charset="-122"/>
-            </a:endParaRPr>
-          </a:p>
-        </p:txBody>
-      </p:sp>
-      <p:sp>
-        <p:nvSpPr>
-          <p:cNvPr id="99" name="文本框 98"/>
-          <p:cNvSpPr txBox="1"/>
-          <p:nvPr/>
-        </p:nvSpPr>
-        <p:spPr>
-          <a:xfrm>
-            <a:off x="7180580" y="6154738"/>
-            <a:ext cx="2487295" cy="297180"/>
-          </a:xfrm>
-          <a:prstGeom prst="rect">
-            <a:avLst/>
-          </a:prstGeom>
-          <a:noFill/>
-        </p:spPr>
-        <p:txBody>
-          <a:bodyPr wrap="square" rtlCol="0">
-            <a:spAutoFit/>
-          </a:bodyPr>
-          <a:lstStyle/>
-          <a:p>
-            <a:pPr algn="ctr"/>
-            <a:r>
-              <a:rPr kumimoji="1" lang="zh-CN" altLang="en-US" sz="1335" b="1" dirty="0">
-                <a:solidFill>
-                  <a:srgbClr val="2E54A1"/>
-                </a:solidFill>
-                <a:latin typeface="微软雅黑" panose="020B0503020204020204" charset="-122"/>
-                <a:ea typeface="微软雅黑" panose="020B0503020204020204" charset="-122"/>
-              </a:rPr>
-              <a:t>端侧智能大模型难部署</a:t>
-            </a:r>
-            <a:endParaRPr kumimoji="1" lang="zh-CN" altLang="en-US" sz="1335" b="1" dirty="0">
+            <a:endParaRPr kumimoji="1" lang="zh-CN" altLang="en-US" sz="1600" b="1" spc="300" dirty="0">
               <a:solidFill>
                 <a:srgbClr val="2E54A1"/>
               </a:solidFill>
@@ -4615,8 +4151,8 @@
         </p:nvGrpSpPr>
         <p:grpSpPr>
           <a:xfrm>
-            <a:off x="273685" y="8656320"/>
-            <a:ext cx="9561195" cy="1118870"/>
+            <a:off x="239395" y="8177530"/>
+            <a:ext cx="9561195" cy="1009650"/>
             <a:chOff x="431" y="14304"/>
             <a:chExt cx="15057" cy="1090"/>
           </a:xfrm>
@@ -4659,14 +4195,14 @@
             </a:fontRef>
           </p:style>
           <p:txBody>
-            <a:bodyPr rtlCol="0" anchor="ctr"/>
+            <a:bodyPr vert="eaVert" rtlCol="0" anchor="ctr"/>
             <a:lstStyle/>
             <a:p>
               <a:pPr algn="ctr">
                 <a:defRPr/>
               </a:pPr>
               <a:r>
-                <a:rPr lang="zh-CN" altLang="en-US" sz="1500" b="1" dirty="0">
+                <a:rPr lang="zh-CN" altLang="en-US" sz="1500" b="1" spc="300" dirty="0">
                   <a:ln w="0"/>
                   <a:solidFill>
                     <a:schemeClr val="bg1"/>
@@ -4681,47 +4217,9 @@
                   <a:latin typeface="微软雅黑" panose="020B0503020204020204" charset="-122"/>
                   <a:ea typeface="微软雅黑" panose="020B0503020204020204" charset="-122"/>
                 </a:rPr>
-                <a:t>研究</a:t>
+                <a:t>研究内容</a:t>
               </a:r>
-              <a:endParaRPr lang="en-US" altLang="zh-CN" sz="1500" b="1" dirty="0">
-                <a:ln w="0"/>
-                <a:solidFill>
-                  <a:schemeClr val="bg1"/>
-                </a:solidFill>
-                <a:effectLst>
-                  <a:outerShdw blurRad="38100" dist="19050" dir="2700000" algn="tl" rotWithShape="0">
-                    <a:prstClr val="black">
-                      <a:alpha val="40000"/>
-                    </a:prstClr>
-                  </a:outerShdw>
-                </a:effectLst>
-                <a:latin typeface="微软雅黑" panose="020B0503020204020204" charset="-122"/>
-                <a:ea typeface="微软雅黑" panose="020B0503020204020204" charset="-122"/>
-              </a:endParaRPr>
-            </a:p>
-            <a:p>
-              <a:pPr algn="ctr">
-                <a:defRPr/>
-              </a:pPr>
-              <a:r>
-                <a:rPr lang="zh-CN" altLang="en-US" sz="1500" b="1" dirty="0">
-                  <a:ln w="0"/>
-                  <a:solidFill>
-                    <a:schemeClr val="bg1"/>
-                  </a:solidFill>
-                  <a:effectLst>
-                    <a:outerShdw blurRad="38100" dist="19050" dir="2700000" algn="tl" rotWithShape="0">
-                      <a:prstClr val="black">
-                        <a:alpha val="40000"/>
-                      </a:prstClr>
-                    </a:outerShdw>
-                  </a:effectLst>
-                  <a:latin typeface="微软雅黑" panose="020B0503020204020204" charset="-122"/>
-                  <a:ea typeface="微软雅黑" panose="020B0503020204020204" charset="-122"/>
-                </a:rPr>
-                <a:t>内容</a:t>
-              </a:r>
-              <a:endParaRPr lang="zh-CN" altLang="en-US" sz="1500" b="1" dirty="0">
+              <a:endParaRPr lang="zh-CN" altLang="en-US" sz="1500" b="1" spc="300" dirty="0">
                 <a:ln w="0"/>
                 <a:solidFill>
                   <a:schemeClr val="bg1"/>
@@ -4780,6 +4278,7 @@
           </p:style>
           <p:txBody>
             <a:bodyPr rtlCol="0" anchor="ctr"/>
+            <a:lstStyle/>
             <a:p>
               <a:pPr algn="ctr"/>
               <a:endParaRPr lang="zh-CN" altLang="en-US">
@@ -4797,8 +4296,8 @@
           </p:nvSpPr>
           <p:spPr>
             <a:xfrm flipH="1">
-              <a:off x="1992" y="14396"/>
-              <a:ext cx="3089" cy="907"/>
+              <a:off x="1805" y="14396"/>
+              <a:ext cx="3345" cy="907"/>
             </a:xfrm>
             <a:prstGeom prst="roundRect">
               <a:avLst>
@@ -4835,7 +4334,11 @@
             <a:bodyPr rtlCol="0" anchor="ctr"/>
             <a:lstStyle/>
             <a:p>
-              <a:pPr algn="ctr"/>
+              <a:pPr indent="0" algn="ctr" fontAlgn="auto">
+                <a:lnSpc>
+                  <a:spcPct val="100000"/>
+                </a:lnSpc>
+              </a:pPr>
               <a:r>
                 <a:rPr lang="zh-CN" altLang="en-US" sz="1200" b="1" dirty="0">
                   <a:solidFill>
@@ -4845,51 +4348,7 @@
                   <a:ea typeface="微软雅黑" panose="020B0503020204020204" charset="-122"/>
                   <a:sym typeface="+mn-ea"/>
                 </a:rPr>
-                <a:t>海杂波干扰下微弱电磁</a:t>
-              </a:r>
-              <a:endParaRPr lang="zh-CN" altLang="en-US" sz="1200" b="1" dirty="0">
-                <a:solidFill>
-                  <a:schemeClr val="tx1"/>
-                </a:solidFill>
-                <a:latin typeface="微软雅黑" panose="020B0503020204020204" charset="-122"/>
-                <a:ea typeface="微软雅黑" panose="020B0503020204020204" charset="-122"/>
-                <a:sym typeface="+mn-ea"/>
-              </a:endParaRPr>
-            </a:p>
-            <a:p>
-              <a:pPr algn="ctr"/>
-              <a:r>
-                <a:rPr lang="zh-CN" altLang="en-US" sz="1200" b="1" dirty="0">
-                  <a:solidFill>
-                    <a:schemeClr val="tx1"/>
-                  </a:solidFill>
-                  <a:latin typeface="微软雅黑" panose="020B0503020204020204" charset="-122"/>
-                  <a:ea typeface="微软雅黑" panose="020B0503020204020204" charset="-122"/>
-                  <a:sym typeface="+mn-ea"/>
-                </a:rPr>
-                <a:t>频谱信号传播规律</a:t>
-              </a:r>
-              <a:endParaRPr lang="zh-CN" altLang="en-US" sz="1200" b="1" dirty="0">
-                <a:solidFill>
-                  <a:schemeClr val="tx1"/>
-                </a:solidFill>
-                <a:latin typeface="微软雅黑" panose="020B0503020204020204" charset="-122"/>
-                <a:ea typeface="微软雅黑" panose="020B0503020204020204" charset="-122"/>
-                <a:sym typeface="+mn-ea"/>
-              </a:endParaRPr>
-            </a:p>
-            <a:p>
-              <a:pPr algn="ctr"/>
-              <a:r>
-                <a:rPr lang="zh-CN" altLang="en-US" sz="1200" b="1" dirty="0">
-                  <a:solidFill>
-                    <a:schemeClr val="tx1"/>
-                  </a:solidFill>
-                  <a:latin typeface="微软雅黑" panose="020B0503020204020204" charset="-122"/>
-                  <a:ea typeface="微软雅黑" panose="020B0503020204020204" charset="-122"/>
-                  <a:sym typeface="+mn-ea"/>
-                </a:rPr>
-                <a:t>分析与提取</a:t>
+                <a:t>海杂波干扰下微弱电磁频谱信号传播规律分析与提取</a:t>
               </a:r>
               <a:endParaRPr lang="zh-CN" altLang="en-US" sz="1200" b="1" dirty="0">
                 <a:solidFill>
@@ -4910,8 +4369,8 @@
           </p:nvSpPr>
           <p:spPr>
             <a:xfrm flipH="1">
-              <a:off x="5366" y="14395"/>
-              <a:ext cx="3089" cy="908"/>
+              <a:off x="5230" y="14395"/>
+              <a:ext cx="3345" cy="908"/>
             </a:xfrm>
             <a:prstGeom prst="roundRect">
               <a:avLst>
@@ -4945,11 +4404,76 @@
             </a:fontRef>
           </p:style>
           <p:txBody>
-            <a:bodyPr rtlCol="0" anchor="ctr"/>
+            <a:bodyPr vertOverflow="overflow" horzOverflow="overflow" vert="horz" wrap="square" numCol="1" spcCol="0" rtlCol="0" fromWordArt="0" anchor="ctr" anchorCtr="0" forceAA="0" compatLnSpc="1">
+              <a:noAutofit/>
+            </a:bodyPr>
             <a:lstStyle/>
             <a:p>
-              <a:pPr algn="ctr"/>
-              <a:endParaRPr lang="zh-CN" altLang="en-US" sz="1100" b="1" dirty="0">
+              <a:pPr lvl="0" algn="ctr">
+                <a:buClrTx/>
+                <a:buSzTx/>
+                <a:buFontTx/>
+              </a:pPr>
+              <a:r>
+                <a:rPr lang="zh-CN" altLang="en-US" sz="1200" b="1" dirty="0">
+                  <a:solidFill>
+                    <a:schemeClr val="tx1"/>
+                  </a:solidFill>
+                  <a:latin typeface="微软雅黑" panose="020B0503020204020204" charset="-122"/>
+                  <a:ea typeface="微软雅黑" panose="020B0503020204020204" charset="-122"/>
+                  <a:sym typeface="+mn-ea"/>
+                </a:rPr>
+                <a:t>有限算力端侧</a:t>
+              </a:r>
+              <a:r>
+                <a:rPr lang="zh-CN" altLang="en-US" sz="1200" b="1" dirty="0">
+                  <a:solidFill>
+                    <a:schemeClr val="tx1"/>
+                  </a:solidFill>
+                  <a:latin typeface="微软雅黑" panose="020B0503020204020204" charset="-122"/>
+                  <a:ea typeface="微软雅黑" panose="020B0503020204020204" charset="-122"/>
+                  <a:sym typeface="+mn-ea"/>
+                </a:rPr>
+                <a:t>频谱</a:t>
+              </a:r>
+              <a:r>
+                <a:rPr lang="zh-CN" altLang="en-US" sz="1200" b="1" dirty="0">
+                  <a:solidFill>
+                    <a:schemeClr val="tx1"/>
+                  </a:solidFill>
+                  <a:latin typeface="微软雅黑" panose="020B0503020204020204" charset="-122"/>
+                  <a:ea typeface="微软雅黑" panose="020B0503020204020204" charset="-122"/>
+                  <a:sym typeface="+mn-ea"/>
+                </a:rPr>
+                <a:t>数据的</a:t>
+              </a:r>
+              <a:endParaRPr lang="zh-CN" altLang="en-US" sz="1200" b="1" dirty="0">
+                <a:solidFill>
+                  <a:schemeClr val="tx1"/>
+                </a:solidFill>
+                <a:latin typeface="微软雅黑" panose="020B0503020204020204" charset="-122"/>
+                <a:ea typeface="微软雅黑" panose="020B0503020204020204" charset="-122"/>
+                <a:sym typeface="+mn-ea"/>
+              </a:endParaRPr>
+            </a:p>
+            <a:p>
+              <a:pPr lvl="0" algn="ctr">
+                <a:buClrTx/>
+                <a:buSzTx/>
+                <a:buFontTx/>
+              </a:pPr>
+              <a:r>
+                <a:rPr lang="zh-CN" altLang="en-US" sz="1200" b="1" dirty="0">
+                  <a:solidFill>
+                    <a:schemeClr val="tx1"/>
+                  </a:solidFill>
+                  <a:latin typeface="微软雅黑" panose="020B0503020204020204" charset="-122"/>
+                  <a:ea typeface="微软雅黑" panose="020B0503020204020204" charset="-122"/>
+                  <a:sym typeface="+mn-ea"/>
+                </a:rPr>
+                <a:t>轻量存储和可信管理方法</a:t>
+              </a:r>
+              <a:endParaRPr lang="zh-CN" altLang="en-US" sz="1200" b="1" dirty="0">
                 <a:solidFill>
                   <a:schemeClr val="tx1"/>
                 </a:solidFill>
@@ -4968,8 +4492,8 @@
           </p:nvSpPr>
           <p:spPr>
             <a:xfrm flipH="1">
-              <a:off x="8718" y="14395"/>
-              <a:ext cx="3089" cy="908"/>
+              <a:off x="8655" y="14395"/>
+              <a:ext cx="3345" cy="908"/>
             </a:xfrm>
             <a:prstGeom prst="roundRect">
               <a:avLst>
@@ -5003,10 +4527,16 @@
             </a:fontRef>
           </p:style>
           <p:txBody>
-            <a:bodyPr rtlCol="0" anchor="ctr"/>
+            <a:bodyPr vertOverflow="overflow" horzOverflow="overflow" vert="horz" wrap="square" numCol="1" spcCol="0" rtlCol="0" fromWordArt="0" anchor="ctr" anchorCtr="0" forceAA="0" compatLnSpc="1">
+              <a:noAutofit/>
+            </a:bodyPr>
             <a:lstStyle/>
             <a:p>
-              <a:pPr algn="ctr"/>
+              <a:pPr lvl="0" algn="ctr">
+                <a:buClrTx/>
+                <a:buSzTx/>
+                <a:buFontTx/>
+              </a:pPr>
               <a:r>
                 <a:rPr lang="zh-CN" altLang="en-US" sz="1200" b="1" dirty="0">
                   <a:solidFill>
@@ -5016,51 +4546,7 @@
                   <a:ea typeface="微软雅黑" panose="020B0503020204020204" charset="-122"/>
                   <a:sym typeface="+mn-ea"/>
                 </a:rPr>
-                <a:t>基于频谱知识图谱的</a:t>
-              </a:r>
-              <a:endParaRPr lang="zh-CN" altLang="en-US" sz="1200" b="1" dirty="0">
-                <a:solidFill>
-                  <a:schemeClr val="tx1"/>
-                </a:solidFill>
-                <a:latin typeface="微软雅黑" panose="020B0503020204020204" charset="-122"/>
-                <a:ea typeface="微软雅黑" panose="020B0503020204020204" charset="-122"/>
-                <a:sym typeface="+mn-ea"/>
-              </a:endParaRPr>
-            </a:p>
-            <a:p>
-              <a:pPr algn="ctr"/>
-              <a:r>
-                <a:rPr lang="zh-CN" altLang="en-US" sz="1200" b="1" dirty="0">
-                  <a:solidFill>
-                    <a:schemeClr val="tx1"/>
-                  </a:solidFill>
-                  <a:latin typeface="微软雅黑" panose="020B0503020204020204" charset="-122"/>
-                  <a:ea typeface="微软雅黑" panose="020B0503020204020204" charset="-122"/>
-                  <a:sym typeface="+mn-ea"/>
-                </a:rPr>
-                <a:t>轻量化目标识别与</a:t>
-              </a:r>
-              <a:endParaRPr lang="zh-CN" altLang="en-US" sz="1200" b="1" dirty="0">
-                <a:solidFill>
-                  <a:schemeClr val="tx1"/>
-                </a:solidFill>
-                <a:latin typeface="微软雅黑" panose="020B0503020204020204" charset="-122"/>
-                <a:ea typeface="微软雅黑" panose="020B0503020204020204" charset="-122"/>
-                <a:sym typeface="+mn-ea"/>
-              </a:endParaRPr>
-            </a:p>
-            <a:p>
-              <a:pPr algn="ctr"/>
-              <a:r>
-                <a:rPr lang="zh-CN" altLang="en-US" sz="1200" b="1" dirty="0">
-                  <a:solidFill>
-                    <a:schemeClr val="tx1"/>
-                  </a:solidFill>
-                  <a:latin typeface="微软雅黑" panose="020B0503020204020204" charset="-122"/>
-                  <a:ea typeface="微软雅黑" panose="020B0503020204020204" charset="-122"/>
-                  <a:sym typeface="+mn-ea"/>
-                </a:rPr>
-                <a:t>可信协同决策</a:t>
+                <a:t>基于频谱知识图谱的轻量化目标识别与可信协同决策</a:t>
               </a:r>
               <a:endParaRPr lang="zh-CN" altLang="en-US" sz="1200" b="1" dirty="0">
                 <a:solidFill>
@@ -5082,7 +4568,7 @@
           <p:spPr>
             <a:xfrm flipH="1">
               <a:off x="12080" y="14395"/>
-              <a:ext cx="3089" cy="908"/>
+              <a:ext cx="3345" cy="908"/>
             </a:xfrm>
             <a:prstGeom prst="roundRect">
               <a:avLst>
@@ -5116,10 +4602,16 @@
             </a:fontRef>
           </p:style>
           <p:txBody>
-            <a:bodyPr rtlCol="0" anchor="ctr"/>
+            <a:bodyPr vertOverflow="overflow" horzOverflow="overflow" vert="horz" wrap="square" numCol="1" spcCol="0" rtlCol="0" fromWordArt="0" anchor="ctr" anchorCtr="0" forceAA="0" compatLnSpc="1">
+              <a:noAutofit/>
+            </a:bodyPr>
             <a:lstStyle/>
             <a:p>
-              <a:pPr algn="ctr"/>
+              <a:pPr lvl="0" algn="ctr">
+                <a:buClrTx/>
+                <a:buSzTx/>
+                <a:buFontTx/>
+              </a:pPr>
               <a:r>
                 <a:rPr lang="zh-CN" altLang="en-US" sz="1200" b="1" dirty="0">
                   <a:solidFill>
@@ -5141,7 +4633,11 @@
               </a:endParaRPr>
             </a:p>
             <a:p>
-              <a:pPr algn="ctr"/>
+              <a:pPr lvl="0" algn="ctr">
+                <a:buClrTx/>
+                <a:buSzTx/>
+                <a:buFontTx/>
+              </a:pPr>
               <a:r>
                 <a:rPr lang="zh-CN" altLang="en-US" sz="1200" b="1" dirty="0">
                   <a:solidFill>
@@ -5164,101 +4660,7 @@
             </a:p>
           </p:txBody>
         </p:sp>
-        <p:sp>
-          <p:nvSpPr>
-            <p:cNvPr id="107" name="文本框 106"/>
-            <p:cNvSpPr txBox="1"/>
-            <p:nvPr/>
-          </p:nvSpPr>
-          <p:spPr>
-            <a:xfrm>
-              <a:off x="5173" y="14625"/>
-              <a:ext cx="3388" cy="448"/>
-            </a:xfrm>
-            <a:prstGeom prst="rect">
-              <a:avLst/>
-            </a:prstGeom>
-            <a:noFill/>
-          </p:spPr>
-          <p:txBody>
-            <a:bodyPr wrap="square" rtlCol="0">
-              <a:spAutoFit/>
-            </a:bodyPr>
-            <a:p>
-              <a:pPr algn="ctr"/>
-              <a:r>
-                <a:rPr lang="zh-CN" altLang="en-US" sz="1200" b="1" spc="-50" dirty="0">
-                  <a:solidFill>
-                    <a:schemeClr val="tx1"/>
-                  </a:solidFill>
-                  <a:uFillTx/>
-                  <a:latin typeface="微软雅黑" panose="020B0503020204020204" charset="-122"/>
-                  <a:ea typeface="微软雅黑" panose="020B0503020204020204" charset="-122"/>
-                  <a:sym typeface="+mn-ea"/>
-                </a:rPr>
-                <a:t>有限算力端侧频谱数据的</a:t>
-              </a:r>
-              <a:endParaRPr lang="zh-CN" altLang="en-US" sz="1200" b="1" spc="-50" dirty="0">
-                <a:solidFill>
-                  <a:schemeClr val="tx1"/>
-                </a:solidFill>
-                <a:uFillTx/>
-                <a:latin typeface="微软雅黑" panose="020B0503020204020204" charset="-122"/>
-                <a:ea typeface="微软雅黑" panose="020B0503020204020204" charset="-122"/>
-                <a:sym typeface="+mn-ea"/>
-              </a:endParaRPr>
-            </a:p>
-            <a:p>
-              <a:pPr algn="ctr"/>
-              <a:r>
-                <a:rPr lang="zh-CN" altLang="en-US" sz="1200" b="1" spc="-50" dirty="0">
-                  <a:solidFill>
-                    <a:schemeClr val="tx1"/>
-                  </a:solidFill>
-                  <a:uFillTx/>
-                  <a:latin typeface="微软雅黑" panose="020B0503020204020204" charset="-122"/>
-                  <a:ea typeface="微软雅黑" panose="020B0503020204020204" charset="-122"/>
-                  <a:sym typeface="+mn-ea"/>
-                </a:rPr>
-                <a:t>轻量存储和可信管理方法</a:t>
-              </a:r>
-              <a:endParaRPr lang="zh-CN" altLang="en-US" sz="1200" b="1" spc="-50" dirty="0">
-                <a:solidFill>
-                  <a:schemeClr val="tx1"/>
-                </a:solidFill>
-                <a:uFillTx/>
-                <a:latin typeface="微软雅黑" panose="020B0503020204020204" charset="-122"/>
-                <a:ea typeface="微软雅黑" panose="020B0503020204020204" charset="-122"/>
-                <a:sym typeface="+mn-ea"/>
-              </a:endParaRPr>
-            </a:p>
-          </p:txBody>
-        </p:sp>
       </p:grpSp>
-      <p:pic>
-        <p:nvPicPr>
-          <p:cNvPr id="118" name="图片 117"/>
-          <p:cNvPicPr>
-            <a:picLocks noChangeAspect="1"/>
-          </p:cNvPicPr>
-          <p:nvPr/>
-        </p:nvPicPr>
-        <p:blipFill>
-          <a:blip r:embed="rId3"/>
-          <a:stretch>
-            <a:fillRect/>
-          </a:stretch>
-        </p:blipFill>
-        <p:spPr>
-          <a:xfrm>
-            <a:off x="1377315" y="102235"/>
-            <a:ext cx="3255010" cy="2167255"/>
-          </a:xfrm>
-          <a:prstGeom prst="rect">
-            <a:avLst/>
-          </a:prstGeom>
-        </p:spPr>
-      </p:pic>
       <p:pic>
         <p:nvPicPr>
           <p:cNvPr id="119" name="图片 118"/>
@@ -5275,7 +4677,7 @@
         </p:blipFill>
         <p:spPr>
           <a:xfrm>
-            <a:off x="1070610" y="1955165"/>
+            <a:off x="1036320" y="1944370"/>
             <a:ext cx="8751570" cy="3814445"/>
           </a:xfrm>
           <a:prstGeom prst="rect">
@@ -5283,40 +4685,48 @@
           </a:prstGeom>
         </p:spPr>
       </p:pic>
-      <p:pic>
-        <p:nvPicPr>
-          <p:cNvPr id="122" name="图片 121"/>
-          <p:cNvPicPr>
-            <a:picLocks noChangeAspect="1"/>
-          </p:cNvPicPr>
+      <p:sp>
+        <p:nvSpPr>
+          <p:cNvPr id="4" name="文本框 3"/>
+          <p:cNvSpPr txBox="1"/>
           <p:nvPr/>
-        </p:nvPicPr>
-        <p:blipFill>
-          <a:blip r:embed="rId5"/>
-          <a:srcRect b="35468"/>
-          <a:stretch>
-            <a:fillRect/>
-          </a:stretch>
-        </p:blipFill>
+        </p:nvSpPr>
         <p:spPr>
           <a:xfrm>
-            <a:off x="1423988" y="6665595"/>
-            <a:ext cx="2110740" cy="927735"/>
+            <a:off x="6993255" y="2889885"/>
+            <a:ext cx="1062355" cy="227965"/>
           </a:xfrm>
           <a:prstGeom prst="rect">
             <a:avLst/>
           </a:prstGeom>
+          <a:solidFill>
+            <a:schemeClr val="bg1"/>
+          </a:solidFill>
         </p:spPr>
-      </p:pic>
-      <p:sp>
-        <p:nvSpPr>
-          <p:cNvPr id="2" name="文本框 1"/>
+        <p:txBody>
+          <a:bodyPr wrap="square" rtlCol="0">
+            <a:noAutofit/>
+          </a:bodyPr>
+          <a:lstStyle/>
+          <a:p>
+            <a:pPr algn="ctr"/>
+            <a:r>
+              <a:rPr lang="zh-CN" altLang="en-US" sz="1100" b="1" dirty="0"/>
+              <a:t>频谱接收设备</a:t>
+            </a:r>
+            <a:endParaRPr lang="zh-CN" altLang="en-US" sz="1100" b="1" dirty="0"/>
+          </a:p>
+        </p:txBody>
+      </p:sp>
+      <p:sp>
+        <p:nvSpPr>
+          <p:cNvPr id="5" name="文本框 4"/>
           <p:cNvSpPr txBox="1"/>
           <p:nvPr/>
         </p:nvSpPr>
         <p:spPr>
           <a:xfrm>
-            <a:off x="7084695" y="2900680"/>
+            <a:off x="7960995" y="2889885"/>
             <a:ext cx="873125" cy="227965"/>
           </a:xfrm>
           <a:prstGeom prst="rect">
@@ -5330,61 +4740,26 @@
           <a:bodyPr wrap="square" rtlCol="0">
             <a:noAutofit/>
           </a:bodyPr>
+          <a:lstStyle/>
           <a:p>
             <a:pPr algn="ctr"/>
             <a:r>
-              <a:rPr lang="zh-CN" altLang="en-US" sz="900" b="1"/>
-              <a:t>频谱接收设备</a:t>
-            </a:r>
-            <a:endParaRPr lang="zh-CN" altLang="en-US" sz="900" b="1"/>
-          </a:p>
-        </p:txBody>
-      </p:sp>
-      <p:sp>
-        <p:nvSpPr>
-          <p:cNvPr id="3" name="文本框 2"/>
+              <a:rPr lang="zh-CN" altLang="en-US" sz="1100" b="1" dirty="0"/>
+              <a:t>存储设备</a:t>
+            </a:r>
+            <a:endParaRPr lang="zh-CN" altLang="en-US" sz="1100" b="1" dirty="0"/>
+          </a:p>
+        </p:txBody>
+      </p:sp>
+      <p:sp>
+        <p:nvSpPr>
+          <p:cNvPr id="6" name="文本框 5"/>
           <p:cNvSpPr txBox="1"/>
           <p:nvPr/>
         </p:nvSpPr>
         <p:spPr>
           <a:xfrm>
-            <a:off x="7995285" y="2900680"/>
-            <a:ext cx="873125" cy="227965"/>
-          </a:xfrm>
-          <a:prstGeom prst="rect">
-            <a:avLst/>
-          </a:prstGeom>
-          <a:solidFill>
-            <a:schemeClr val="bg1"/>
-          </a:solidFill>
-        </p:spPr>
-        <p:txBody>
-          <a:bodyPr wrap="square" rtlCol="0">
-            <a:noAutofit/>
-          </a:bodyPr>
-          <a:p>
-            <a:pPr algn="ctr"/>
-            <a:r>
-              <a:rPr lang="zh-CN" altLang="en-US" sz="900" b="1"/>
-              <a:t>存储</a:t>
-            </a:r>
-            <a:r>
-              <a:rPr lang="zh-CN" altLang="en-US" sz="900" b="1"/>
-              <a:t>设备</a:t>
-            </a:r>
-            <a:endParaRPr lang="zh-CN" altLang="en-US" sz="900" b="1"/>
-          </a:p>
-        </p:txBody>
-      </p:sp>
-      <p:sp>
-        <p:nvSpPr>
-          <p:cNvPr id="4" name="文本框 3"/>
-          <p:cNvSpPr txBox="1"/>
-          <p:nvPr/>
-        </p:nvSpPr>
-        <p:spPr>
-          <a:xfrm>
-            <a:off x="8926830" y="2900680"/>
+            <a:off x="8892540" y="2889885"/>
             <a:ext cx="757555" cy="227965"/>
           </a:xfrm>
           <a:prstGeom prst="rect">
@@ -5398,292 +4773,943 @@
           <a:bodyPr wrap="square" rtlCol="0">
             <a:noAutofit/>
           </a:bodyPr>
+          <a:lstStyle/>
           <a:p>
             <a:pPr algn="ctr"/>
             <a:r>
-              <a:rPr lang="zh-CN" altLang="en-US" sz="900" b="1"/>
+              <a:rPr lang="zh-CN" altLang="en-US" sz="1100" b="1" dirty="0"/>
               <a:t>计算设备</a:t>
             </a:r>
-            <a:endParaRPr lang="zh-CN" altLang="en-US" sz="900" b="1"/>
-          </a:p>
-        </p:txBody>
-      </p:sp>
-      <p:pic>
-        <p:nvPicPr>
-          <p:cNvPr id="6" name="图片 5" descr="ChatGPT Image 2026年6月22日 15_11_53"/>
-          <p:cNvPicPr>
-            <a:picLocks noChangeAspect="1"/>
-          </p:cNvPicPr>
+            <a:endParaRPr lang="zh-CN" altLang="en-US" sz="1100" b="1" dirty="0"/>
+          </a:p>
+        </p:txBody>
+      </p:sp>
+      <p:grpSp>
+        <p:nvGrpSpPr>
+          <p:cNvPr id="14" name="组合 13"/>
+          <p:cNvGrpSpPr/>
           <p:nvPr/>
-        </p:nvPicPr>
-        <p:blipFill>
-          <a:blip r:embed="rId6"/>
-          <a:srcRect b="41574"/>
-          <a:stretch>
-            <a:fillRect/>
-          </a:stretch>
-        </p:blipFill>
-        <p:spPr>
+        </p:nvGrpSpPr>
+        <p:grpSpPr>
           <a:xfrm>
-            <a:off x="4290060" y="6618605"/>
-            <a:ext cx="2226945" cy="867410"/>
+            <a:off x="239395" y="5953125"/>
+            <a:ext cx="9561830" cy="2040890"/>
+            <a:chOff x="431" y="9392"/>
+            <a:chExt cx="15058" cy="3824"/>
           </a:xfrm>
-          <a:prstGeom prst="rect">
-            <a:avLst/>
-          </a:prstGeom>
-        </p:spPr>
-      </p:pic>
-      <p:pic>
-        <p:nvPicPr>
-          <p:cNvPr id="7" name="图片 6" descr="ChatGPT Image 2026年6月22日 15_12_31"/>
-          <p:cNvPicPr>
-            <a:picLocks noChangeAspect="1"/>
-          </p:cNvPicPr>
-          <p:nvPr/>
-        </p:nvPicPr>
-        <p:blipFill>
-          <a:blip r:embed="rId7"/>
-          <a:srcRect b="39570"/>
-          <a:stretch>
-            <a:fillRect/>
-          </a:stretch>
-        </p:blipFill>
-        <p:spPr>
-          <a:xfrm>
-            <a:off x="7204075" y="6665595"/>
-            <a:ext cx="2440305" cy="820420"/>
-          </a:xfrm>
-          <a:prstGeom prst="rect">
-            <a:avLst/>
-          </a:prstGeom>
-        </p:spPr>
-      </p:pic>
-      <p:sp>
-        <p:nvSpPr>
-          <p:cNvPr id="5" name="文本框 4"/>
-          <p:cNvSpPr txBox="1"/>
-          <p:nvPr/>
-        </p:nvSpPr>
-        <p:spPr>
-          <a:xfrm>
-            <a:off x="1551623" y="7798435"/>
-            <a:ext cx="1855470" cy="297180"/>
-          </a:xfrm>
-          <a:prstGeom prst="rect">
-            <a:avLst/>
-          </a:prstGeom>
-          <a:solidFill>
-            <a:srgbClr val="2E54A1"/>
-          </a:solidFill>
-        </p:spPr>
-        <p:txBody>
-          <a:bodyPr wrap="square" rtlCol="0">
-            <a:spAutoFit/>
-          </a:bodyPr>
-          <a:lstStyle/>
-          <a:p>
-            <a:pPr algn="ctr"/>
-            <a:r>
-              <a:rPr kumimoji="1" lang="zh-CN" altLang="en-US" sz="1335" b="1" dirty="0">
+        </p:grpSpPr>
+        <p:sp>
+          <p:nvSpPr>
+            <p:cNvPr id="25" name="圆角矩形 24"/>
+            <p:cNvSpPr/>
+            <p:nvPr/>
+          </p:nvSpPr>
+          <p:spPr>
+            <a:xfrm>
+              <a:off x="1686" y="9394"/>
+              <a:ext cx="13803" cy="3819"/>
+            </a:xfrm>
+            <a:prstGeom prst="roundRect">
+              <a:avLst>
+                <a:gd name="adj" fmla="val 0"/>
+              </a:avLst>
+            </a:prstGeom>
+            <a:solidFill>
+              <a:schemeClr val="accent1">
+                <a:lumMod val="20000"/>
+                <a:lumOff val="80000"/>
+              </a:schemeClr>
+            </a:solidFill>
+            <a:ln>
+              <a:noFill/>
+            </a:ln>
+          </p:spPr>
+          <p:style>
+            <a:lnRef idx="2">
+              <a:schemeClr val="accent1">
+                <a:lumMod val="75000"/>
+              </a:schemeClr>
+            </a:lnRef>
+            <a:fillRef idx="1">
+              <a:schemeClr val="accent1"/>
+            </a:fillRef>
+            <a:effectRef idx="0">
+              <a:srgbClr val="FFFFFF"/>
+            </a:effectRef>
+            <a:fontRef idx="minor">
+              <a:schemeClr val="lt1"/>
+            </a:fontRef>
+          </p:style>
+          <p:txBody>
+            <a:bodyPr rtlCol="0" anchor="ctr"/>
+            <a:lstStyle/>
+            <a:p>
+              <a:pPr algn="ctr"/>
+              <a:endParaRPr lang="zh-CN" altLang="en-US">
+                <a:latin typeface="微软雅黑" panose="020B0503020204020204" charset="-122"/>
+                <a:ea typeface="微软雅黑" panose="020B0503020204020204" charset="-122"/>
+              </a:endParaRPr>
+            </a:p>
+          </p:txBody>
+        </p:sp>
+        <p:sp>
+          <p:nvSpPr>
+            <p:cNvPr id="27" name="矩形: 圆角 93"/>
+            <p:cNvSpPr/>
+            <p:nvPr/>
+          </p:nvSpPr>
+          <p:spPr>
+            <a:xfrm>
+              <a:off x="431" y="9392"/>
+              <a:ext cx="1255" cy="3824"/>
+            </a:xfrm>
+            <a:prstGeom prst="roundRect">
+              <a:avLst>
+                <a:gd name="adj" fmla="val 0"/>
+              </a:avLst>
+            </a:prstGeom>
+            <a:solidFill>
+              <a:srgbClr val="2E54A1"/>
+            </a:solidFill>
+            <a:ln w="25400">
+              <a:noFill/>
+            </a:ln>
+          </p:spPr>
+          <p:style>
+            <a:lnRef idx="2">
+              <a:schemeClr val="dk1"/>
+            </a:lnRef>
+            <a:fillRef idx="1">
+              <a:schemeClr val="lt1"/>
+            </a:fillRef>
+            <a:effectRef idx="0">
+              <a:schemeClr val="dk1"/>
+            </a:effectRef>
+            <a:fontRef idx="minor">
+              <a:schemeClr val="dk1"/>
+            </a:fontRef>
+          </p:style>
+          <p:txBody>
+            <a:bodyPr vert="eaVert" rtlCol="0" anchor="ctr"/>
+            <a:lstStyle/>
+            <a:p>
+              <a:pPr algn="ctr">
+                <a:defRPr/>
+              </a:pPr>
+              <a:r>
+                <a:rPr lang="zh-CN" altLang="en-US" b="1" spc="300" dirty="0">
+                  <a:ln w="0"/>
+                  <a:solidFill>
+                    <a:schemeClr val="bg1"/>
+                  </a:solidFill>
+                  <a:effectLst>
+                    <a:outerShdw blurRad="38100" dist="19050" dir="2700000" algn="tl" rotWithShape="0">
+                      <a:prstClr val="black">
+                        <a:alpha val="40000"/>
+                      </a:prstClr>
+                    </a:outerShdw>
+                  </a:effectLst>
+                  <a:latin typeface="微软雅黑" panose="020B0503020204020204" charset="-122"/>
+                  <a:ea typeface="微软雅黑" panose="020B0503020204020204" charset="-122"/>
+                </a:rPr>
+                <a:t>现状与挑战</a:t>
+              </a:r>
+              <a:endParaRPr lang="zh-CN" altLang="en-US" b="1" spc="300" dirty="0">
+                <a:ln w="0"/>
                 <a:solidFill>
                   <a:schemeClr val="bg1"/>
                 </a:solidFill>
+                <a:effectLst>
+                  <a:outerShdw blurRad="38100" dist="19050" dir="2700000" algn="tl" rotWithShape="0">
+                    <a:prstClr val="black">
+                      <a:alpha val="40000"/>
+                    </a:prstClr>
+                  </a:outerShdw>
+                </a:effectLst>
                 <a:latin typeface="微软雅黑" panose="020B0503020204020204" charset="-122"/>
                 <a:ea typeface="微软雅黑" panose="020B0503020204020204" charset="-122"/>
-              </a:rPr>
-              <a:t>辐射目标</a:t>
-            </a:r>
-            <a:r>
-              <a:rPr kumimoji="1" lang="en-US" altLang="zh-CN" sz="1335" b="1" dirty="0">
+              </a:endParaRPr>
+            </a:p>
+          </p:txBody>
+        </p:sp>
+        <p:sp>
+          <p:nvSpPr>
+            <p:cNvPr id="72" name="矩形: 圆角 8"/>
+            <p:cNvSpPr/>
+            <p:nvPr/>
+          </p:nvSpPr>
+          <p:spPr>
+            <a:xfrm flipH="1">
+              <a:off x="1920" y="9612"/>
+              <a:ext cx="3969" cy="3383"/>
+            </a:xfrm>
+            <a:prstGeom prst="roundRect">
+              <a:avLst>
+                <a:gd name="adj" fmla="val 6238"/>
+              </a:avLst>
+            </a:prstGeom>
+            <a:solidFill>
+              <a:schemeClr val="bg1"/>
+            </a:solidFill>
+            <a:ln w="19050">
+              <a:solidFill>
+                <a:srgbClr val="2E54A1"/>
+              </a:solidFill>
+              <a:prstDash val="sysDash"/>
+            </a:ln>
+          </p:spPr>
+          <p:style>
+            <a:lnRef idx="2">
+              <a:schemeClr val="accent1">
+                <a:shade val="50000"/>
+              </a:schemeClr>
+            </a:lnRef>
+            <a:fillRef idx="1">
+              <a:schemeClr val="accent1"/>
+            </a:fillRef>
+            <a:effectRef idx="0">
+              <a:schemeClr val="accent1"/>
+            </a:effectRef>
+            <a:fontRef idx="minor">
+              <a:schemeClr val="lt1"/>
+            </a:fontRef>
+          </p:style>
+          <p:txBody>
+            <a:bodyPr rtlCol="0" anchor="ctr"/>
+            <a:lstStyle/>
+            <a:p>
+              <a:pPr algn="ctr"/>
+              <a:endParaRPr lang="zh-CN" altLang="en-US" sz="2235" dirty="0"/>
+            </a:p>
+          </p:txBody>
+        </p:sp>
+        <p:sp>
+          <p:nvSpPr>
+            <p:cNvPr id="73" name="矩形: 圆角 8"/>
+            <p:cNvSpPr/>
+            <p:nvPr/>
+          </p:nvSpPr>
+          <p:spPr>
+            <a:xfrm flipH="1">
+              <a:off x="6601" y="9614"/>
+              <a:ext cx="3969" cy="3379"/>
+            </a:xfrm>
+            <a:prstGeom prst="roundRect">
+              <a:avLst>
+                <a:gd name="adj" fmla="val 6238"/>
+              </a:avLst>
+            </a:prstGeom>
+            <a:solidFill>
+              <a:schemeClr val="bg1"/>
+            </a:solidFill>
+            <a:ln w="19050">
+              <a:solidFill>
+                <a:srgbClr val="2E54A1"/>
+              </a:solidFill>
+              <a:prstDash val="sysDash"/>
+            </a:ln>
+          </p:spPr>
+          <p:style>
+            <a:lnRef idx="2">
+              <a:schemeClr val="accent1">
+                <a:shade val="50000"/>
+              </a:schemeClr>
+            </a:lnRef>
+            <a:fillRef idx="1">
+              <a:schemeClr val="accent1"/>
+            </a:fillRef>
+            <a:effectRef idx="0">
+              <a:schemeClr val="accent1"/>
+            </a:effectRef>
+            <a:fontRef idx="minor">
+              <a:schemeClr val="lt1"/>
+            </a:fontRef>
+          </p:style>
+          <p:txBody>
+            <a:bodyPr rtlCol="0" anchor="ctr"/>
+            <a:lstStyle/>
+            <a:p>
+              <a:pPr algn="ctr"/>
+              <a:endParaRPr lang="zh-CN" altLang="en-US" sz="2235" dirty="0"/>
+            </a:p>
+          </p:txBody>
+        </p:sp>
+        <p:sp>
+          <p:nvSpPr>
+            <p:cNvPr id="76" name="矩形: 圆角 8"/>
+            <p:cNvSpPr/>
+            <p:nvPr/>
+          </p:nvSpPr>
+          <p:spPr>
+            <a:xfrm flipH="1">
+              <a:off x="11282" y="9621"/>
+              <a:ext cx="3969" cy="3365"/>
+            </a:xfrm>
+            <a:prstGeom prst="roundRect">
+              <a:avLst>
+                <a:gd name="adj" fmla="val 6238"/>
+              </a:avLst>
+            </a:prstGeom>
+            <a:solidFill>
+              <a:schemeClr val="bg1"/>
+            </a:solidFill>
+            <a:ln w="19050">
+              <a:solidFill>
+                <a:srgbClr val="2E54A1"/>
+              </a:solidFill>
+              <a:prstDash val="sysDash"/>
+            </a:ln>
+          </p:spPr>
+          <p:style>
+            <a:lnRef idx="2">
+              <a:schemeClr val="accent1">
+                <a:shade val="50000"/>
+              </a:schemeClr>
+            </a:lnRef>
+            <a:fillRef idx="1">
+              <a:schemeClr val="accent1"/>
+            </a:fillRef>
+            <a:effectRef idx="0">
+              <a:schemeClr val="accent1"/>
+            </a:effectRef>
+            <a:fontRef idx="minor">
+              <a:schemeClr val="lt1"/>
+            </a:fontRef>
+          </p:style>
+          <p:txBody>
+            <a:bodyPr rtlCol="0" anchor="ctr"/>
+            <a:lstStyle/>
+            <a:p>
+              <a:pPr algn="ctr"/>
+              <a:endParaRPr lang="zh-CN" altLang="en-US" sz="2235" dirty="0"/>
+            </a:p>
+          </p:txBody>
+        </p:sp>
+        <p:sp>
+          <p:nvSpPr>
+            <p:cNvPr id="77" name="文本框 76"/>
+            <p:cNvSpPr txBox="1"/>
+            <p:nvPr/>
+          </p:nvSpPr>
+          <p:spPr>
+            <a:xfrm>
+              <a:off x="1911" y="9705"/>
+              <a:ext cx="3951" cy="747"/>
+            </a:xfrm>
+            <a:prstGeom prst="rect">
+              <a:avLst/>
+            </a:prstGeom>
+            <a:noFill/>
+          </p:spPr>
+          <p:txBody>
+            <a:bodyPr wrap="square" rtlCol="0" anchor="ctr" anchorCtr="0">
+              <a:spAutoFit/>
+            </a:bodyPr>
+            <a:lstStyle/>
+            <a:p>
+              <a:pPr algn="ctr"/>
+              <a:r>
+                <a:rPr kumimoji="1" lang="zh-CN" altLang="en-US" sz="1400" b="1" dirty="0">
+                  <a:solidFill>
+                    <a:srgbClr val="C00000"/>
+                  </a:solidFill>
+                  <a:latin typeface="微软雅黑" panose="020B0503020204020204" charset="-122"/>
+                  <a:ea typeface="微软雅黑" panose="020B0503020204020204" charset="-122"/>
+                </a:rPr>
+                <a:t>海杂波下微弱信号 </a:t>
+              </a:r>
+              <a:r>
+                <a:rPr kumimoji="1" lang="zh-CN" altLang="en-US" sz="2000" b="1" dirty="0">
+                  <a:solidFill>
+                    <a:srgbClr val="C00000"/>
+                  </a:solidFill>
+                  <a:latin typeface="微软雅黑" panose="020B0503020204020204" charset="-122"/>
+                  <a:ea typeface="微软雅黑" panose="020B0503020204020204" charset="-122"/>
+                </a:rPr>
+                <a:t>难感知</a:t>
+              </a:r>
+              <a:endParaRPr kumimoji="1" lang="zh-CN" altLang="en-US" sz="2000" b="1" dirty="0">
+                <a:solidFill>
+                  <a:srgbClr val="C00000"/>
+                </a:solidFill>
+                <a:latin typeface="微软雅黑" panose="020B0503020204020204" charset="-122"/>
+                <a:ea typeface="微软雅黑" panose="020B0503020204020204" charset="-122"/>
+              </a:endParaRPr>
+            </a:p>
+          </p:txBody>
+        </p:sp>
+        <p:sp>
+          <p:nvSpPr>
+            <p:cNvPr id="88" name="文本框 87"/>
+            <p:cNvSpPr txBox="1"/>
+            <p:nvPr/>
+          </p:nvSpPr>
+          <p:spPr>
+            <a:xfrm>
+              <a:off x="6650" y="9796"/>
+              <a:ext cx="3817" cy="565"/>
+            </a:xfrm>
+            <a:prstGeom prst="rect">
+              <a:avLst/>
+            </a:prstGeom>
+            <a:noFill/>
+          </p:spPr>
+          <p:txBody>
+            <a:bodyPr wrap="square" rtlCol="0" anchor="ctr" anchorCtr="0">
+              <a:noAutofit/>
+            </a:bodyPr>
+            <a:lstStyle/>
+            <a:p>
+              <a:pPr algn="ctr"/>
+              <a:r>
+                <a:rPr kumimoji="1" lang="zh-CN" altLang="en-US" sz="1400" b="1" dirty="0">
+                  <a:solidFill>
+                    <a:srgbClr val="C00000"/>
+                  </a:solidFill>
+                  <a:latin typeface="微软雅黑" panose="020B0503020204020204" charset="-122"/>
+                  <a:ea typeface="微软雅黑" panose="020B0503020204020204" charset="-122"/>
+                </a:rPr>
+                <a:t>海量频谱数据流 </a:t>
+              </a:r>
+              <a:r>
+                <a:rPr kumimoji="1" lang="zh-CN" altLang="en-US" sz="2000" b="1" dirty="0">
+                  <a:solidFill>
+                    <a:srgbClr val="C00000"/>
+                  </a:solidFill>
+                  <a:latin typeface="微软雅黑" panose="020B0503020204020204" charset="-122"/>
+                  <a:ea typeface="微软雅黑" panose="020B0503020204020204" charset="-122"/>
+                </a:rPr>
+                <a:t>难管理</a:t>
+              </a:r>
+              <a:endParaRPr kumimoji="1" lang="zh-CN" altLang="en-US" sz="2000" b="1" dirty="0">
+                <a:solidFill>
+                  <a:srgbClr val="C00000"/>
+                </a:solidFill>
+                <a:latin typeface="微软雅黑" panose="020B0503020204020204" charset="-122"/>
+                <a:ea typeface="微软雅黑" panose="020B0503020204020204" charset="-122"/>
+              </a:endParaRPr>
+            </a:p>
+          </p:txBody>
+        </p:sp>
+        <p:sp>
+          <p:nvSpPr>
+            <p:cNvPr id="99" name="文本框 98"/>
+            <p:cNvSpPr txBox="1"/>
+            <p:nvPr/>
+          </p:nvSpPr>
+          <p:spPr>
+            <a:xfrm>
+              <a:off x="11342" y="9705"/>
+              <a:ext cx="3917" cy="747"/>
+            </a:xfrm>
+            <a:prstGeom prst="rect">
+              <a:avLst/>
+            </a:prstGeom>
+            <a:noFill/>
+          </p:spPr>
+          <p:txBody>
+            <a:bodyPr wrap="square" rtlCol="0" anchor="ctr" anchorCtr="0">
+              <a:spAutoFit/>
+            </a:bodyPr>
+            <a:lstStyle/>
+            <a:p>
+              <a:pPr algn="ctr"/>
+              <a:r>
+                <a:rPr kumimoji="1" lang="zh-CN" altLang="en-US" sz="1400" b="1" dirty="0">
+                  <a:solidFill>
+                    <a:srgbClr val="C00000"/>
+                  </a:solidFill>
+                  <a:latin typeface="微软雅黑" panose="020B0503020204020204" charset="-122"/>
+                  <a:ea typeface="微软雅黑" panose="020B0503020204020204" charset="-122"/>
+                </a:rPr>
+                <a:t>端侧智能大模型 </a:t>
+              </a:r>
+              <a:r>
+                <a:rPr kumimoji="1" lang="zh-CN" altLang="en-US" sz="2000" b="1" dirty="0">
+                  <a:solidFill>
+                    <a:srgbClr val="C00000"/>
+                  </a:solidFill>
+                  <a:latin typeface="微软雅黑" panose="020B0503020204020204" charset="-122"/>
+                  <a:ea typeface="微软雅黑" panose="020B0503020204020204" charset="-122"/>
+                </a:rPr>
+                <a:t>难部署</a:t>
+              </a:r>
+              <a:endParaRPr kumimoji="1" lang="zh-CN" altLang="en-US" sz="2000" b="1" dirty="0">
+                <a:solidFill>
+                  <a:srgbClr val="C00000"/>
+                </a:solidFill>
+                <a:latin typeface="微软雅黑" panose="020B0503020204020204" charset="-122"/>
+                <a:ea typeface="微软雅黑" panose="020B0503020204020204" charset="-122"/>
+              </a:endParaRPr>
+            </a:p>
+          </p:txBody>
+        </p:sp>
+        <p:pic>
+          <p:nvPicPr>
+            <p:cNvPr id="122" name="图片 121"/>
+            <p:cNvPicPr>
+              <a:picLocks noChangeAspect="1"/>
+            </p:cNvPicPr>
+            <p:nvPr/>
+          </p:nvPicPr>
+          <p:blipFill>
+            <a:blip r:embed="rId5"/>
+            <a:srcRect b="35468"/>
+            <a:stretch>
+              <a:fillRect/>
+            </a:stretch>
+          </p:blipFill>
+          <p:spPr>
+            <a:xfrm>
+              <a:off x="2507" y="10779"/>
+              <a:ext cx="2677" cy="1177"/>
+            </a:xfrm>
+            <a:prstGeom prst="rect">
+              <a:avLst/>
+            </a:prstGeom>
+          </p:spPr>
+        </p:pic>
+        <p:pic>
+          <p:nvPicPr>
+            <p:cNvPr id="7" name="图片 6" descr="ChatGPT Image 2026年6月22日 15_11_53"/>
+            <p:cNvPicPr>
+              <a:picLocks noChangeAspect="1"/>
+            </p:cNvPicPr>
+            <p:nvPr/>
+          </p:nvPicPr>
+          <p:blipFill>
+            <a:blip r:embed="rId6"/>
+            <a:srcRect b="41574"/>
+            <a:stretch>
+              <a:fillRect/>
+            </a:stretch>
+          </p:blipFill>
+          <p:spPr>
+            <a:xfrm>
+              <a:off x="6976" y="10666"/>
+              <a:ext cx="3134" cy="1220"/>
+            </a:xfrm>
+            <a:prstGeom prst="rect">
+              <a:avLst/>
+            </a:prstGeom>
+          </p:spPr>
+        </p:pic>
+        <p:pic>
+          <p:nvPicPr>
+            <p:cNvPr id="8" name="图片 7" descr="ChatGPT Image 2026年6月22日 15_12_31"/>
+            <p:cNvPicPr>
+              <a:picLocks noChangeAspect="1"/>
+            </p:cNvPicPr>
+            <p:nvPr/>
+          </p:nvPicPr>
+          <p:blipFill>
+            <a:blip r:embed="rId7"/>
+            <a:srcRect b="39570"/>
+            <a:stretch>
+              <a:fillRect/>
+            </a:stretch>
+          </p:blipFill>
+          <p:spPr>
+            <a:xfrm>
+              <a:off x="11503" y="10799"/>
+              <a:ext cx="3383" cy="1136"/>
+            </a:xfrm>
+            <a:prstGeom prst="rect">
+              <a:avLst/>
+            </a:prstGeom>
+          </p:spPr>
+        </p:pic>
+        <p:sp>
+          <p:nvSpPr>
+            <p:cNvPr id="9" name="文本框 8"/>
+            <p:cNvSpPr txBox="1"/>
+            <p:nvPr/>
+          </p:nvSpPr>
+          <p:spPr>
+            <a:xfrm>
+              <a:off x="2444" y="12283"/>
+              <a:ext cx="2922" cy="557"/>
+            </a:xfrm>
+            <a:prstGeom prst="rect">
+              <a:avLst/>
+            </a:prstGeom>
+            <a:solidFill>
+              <a:srgbClr val="2E54A1"/>
+            </a:solidFill>
+          </p:spPr>
+          <p:txBody>
+            <a:bodyPr wrap="square" rtlCol="0">
+              <a:spAutoFit/>
+            </a:bodyPr>
+            <a:lstStyle/>
+            <a:p>
+              <a:pPr algn="ctr"/>
+              <a:r>
+                <a:rPr kumimoji="1" lang="zh-CN" altLang="en-US" sz="1335" b="1" dirty="0">
+                  <a:solidFill>
+                    <a:schemeClr val="bg1"/>
+                  </a:solidFill>
+                  <a:latin typeface="微软雅黑" panose="020B0503020204020204" charset="-122"/>
+                  <a:ea typeface="微软雅黑" panose="020B0503020204020204" charset="-122"/>
+                </a:rPr>
+                <a:t>辐射目标</a:t>
+              </a:r>
+              <a:r>
+                <a:rPr kumimoji="1" lang="en-US" altLang="zh-CN" sz="1335" b="1" dirty="0">
+                  <a:solidFill>
+                    <a:schemeClr val="bg1"/>
+                  </a:solidFill>
+                  <a:latin typeface="黑体" panose="02010609060101010101" charset="-122"/>
+                  <a:ea typeface="黑体" panose="02010609060101010101" charset="-122"/>
+                </a:rPr>
+                <a:t>“</a:t>
+              </a:r>
+              <a:r>
+                <a:rPr kumimoji="1" lang="zh-CN" altLang="en-US" sz="1335" b="1" dirty="0">
+                  <a:solidFill>
+                    <a:schemeClr val="bg1"/>
+                  </a:solidFill>
+                  <a:latin typeface="微软雅黑" panose="020B0503020204020204" charset="-122"/>
+                  <a:ea typeface="微软雅黑" panose="020B0503020204020204" charset="-122"/>
+                </a:rPr>
+                <a:t>看不清</a:t>
+              </a:r>
+              <a:r>
+                <a:rPr kumimoji="1" lang="en-US" altLang="zh-CN" sz="1335" b="1" dirty="0">
+                  <a:solidFill>
+                    <a:schemeClr val="bg1"/>
+                  </a:solidFill>
+                  <a:latin typeface="黑体" panose="02010609060101010101" charset="-122"/>
+                  <a:ea typeface="黑体" panose="02010609060101010101" charset="-122"/>
+                </a:rPr>
+                <a:t>”</a:t>
+              </a:r>
+              <a:endParaRPr kumimoji="1" lang="en-US" altLang="zh-CN" sz="1335" b="1" dirty="0">
                 <a:solidFill>
                   <a:schemeClr val="bg1"/>
                 </a:solidFill>
                 <a:latin typeface="黑体" panose="02010609060101010101" charset="-122"/>
                 <a:ea typeface="黑体" panose="02010609060101010101" charset="-122"/>
-              </a:rPr>
-              <a:t>“</a:t>
-            </a:r>
-            <a:r>
-              <a:rPr kumimoji="1" lang="zh-CN" altLang="en-US" sz="1335" b="1" dirty="0">
-                <a:solidFill>
-                  <a:schemeClr val="bg1"/>
-                </a:solidFill>
-                <a:latin typeface="微软雅黑" panose="020B0503020204020204" charset="-122"/>
-                <a:ea typeface="微软雅黑" panose="020B0503020204020204" charset="-122"/>
-              </a:rPr>
-              <a:t>看不清</a:t>
-            </a:r>
-            <a:r>
-              <a:rPr kumimoji="1" lang="en-US" altLang="zh-CN" sz="1335" b="1" dirty="0">
+              </a:endParaRPr>
+            </a:p>
+          </p:txBody>
+        </p:sp>
+        <p:sp>
+          <p:nvSpPr>
+            <p:cNvPr id="10" name="文本框 9"/>
+            <p:cNvSpPr txBox="1"/>
+            <p:nvPr/>
+          </p:nvSpPr>
+          <p:spPr>
+            <a:xfrm>
+              <a:off x="7049" y="12282"/>
+              <a:ext cx="2922" cy="557"/>
+            </a:xfrm>
+            <a:prstGeom prst="rect">
+              <a:avLst/>
+            </a:prstGeom>
+            <a:solidFill>
+              <a:srgbClr val="2E54A1"/>
+            </a:solidFill>
+          </p:spPr>
+          <p:txBody>
+            <a:bodyPr wrap="square" rtlCol="0">
+              <a:spAutoFit/>
+            </a:bodyPr>
+            <a:lstStyle/>
+            <a:p>
+              <a:pPr algn="ctr"/>
+              <a:r>
+                <a:rPr kumimoji="1" lang="zh-CN" altLang="en-US" sz="1335" b="1" dirty="0">
+                  <a:solidFill>
+                    <a:schemeClr val="bg1"/>
+                  </a:solidFill>
+                  <a:latin typeface="微软雅黑" panose="020B0503020204020204" charset="-122"/>
+                  <a:ea typeface="微软雅黑" panose="020B0503020204020204" charset="-122"/>
+                </a:rPr>
+                <a:t>留存取证</a:t>
+              </a:r>
+              <a:r>
+                <a:rPr kumimoji="1" lang="zh-CN" altLang="en-US" sz="1335" b="1" dirty="0">
+                  <a:solidFill>
+                    <a:schemeClr val="bg1"/>
+                  </a:solidFill>
+                  <a:latin typeface="黑体" panose="02010609060101010101" charset="-122"/>
+                  <a:ea typeface="黑体" panose="02010609060101010101" charset="-122"/>
+                </a:rPr>
+                <a:t>“</a:t>
+              </a:r>
+              <a:r>
+                <a:rPr kumimoji="1" lang="zh-CN" altLang="en-US" sz="1335" b="1" dirty="0">
+                  <a:solidFill>
+                    <a:schemeClr val="bg1"/>
+                  </a:solidFill>
+                  <a:latin typeface="微软雅黑" panose="020B0503020204020204" charset="-122"/>
+                  <a:ea typeface="微软雅黑" panose="020B0503020204020204" charset="-122"/>
+                </a:rPr>
+                <a:t>效率低</a:t>
+              </a:r>
+              <a:r>
+                <a:rPr kumimoji="1" lang="zh-CN" altLang="en-US" sz="1335" b="1" dirty="0">
+                  <a:solidFill>
+                    <a:schemeClr val="bg1"/>
+                  </a:solidFill>
+                  <a:latin typeface="黑体" panose="02010609060101010101" charset="-122"/>
+                  <a:ea typeface="黑体" panose="02010609060101010101" charset="-122"/>
+                </a:rPr>
+                <a:t>”</a:t>
+              </a:r>
+              <a:endParaRPr kumimoji="1" lang="zh-CN" altLang="en-US" sz="1335" b="1" dirty="0">
                 <a:solidFill>
                   <a:schemeClr val="bg1"/>
                 </a:solidFill>
                 <a:latin typeface="黑体" panose="02010609060101010101" charset="-122"/>
                 <a:ea typeface="黑体" panose="02010609060101010101" charset="-122"/>
-              </a:rPr>
-              <a:t>”</a:t>
-            </a:r>
-            <a:endParaRPr kumimoji="1" lang="en-US" altLang="zh-CN" sz="1335" b="1" dirty="0">
-              <a:solidFill>
-                <a:schemeClr val="bg1"/>
-              </a:solidFill>
-              <a:latin typeface="黑体" panose="02010609060101010101" charset="-122"/>
-              <a:ea typeface="黑体" panose="02010609060101010101" charset="-122"/>
-            </a:endParaRPr>
-          </a:p>
-        </p:txBody>
-      </p:sp>
-      <p:sp>
-        <p:nvSpPr>
-          <p:cNvPr id="10" name="文本框 9"/>
-          <p:cNvSpPr txBox="1"/>
-          <p:nvPr/>
-        </p:nvSpPr>
-        <p:spPr>
-          <a:xfrm>
-            <a:off x="4475798" y="7798435"/>
-            <a:ext cx="1855470" cy="297180"/>
-          </a:xfrm>
-          <a:prstGeom prst="rect">
-            <a:avLst/>
-          </a:prstGeom>
-          <a:solidFill>
-            <a:srgbClr val="2E54A1"/>
-          </a:solidFill>
-        </p:spPr>
-        <p:txBody>
-          <a:bodyPr wrap="square" rtlCol="0">
-            <a:spAutoFit/>
-          </a:bodyPr>
-          <a:lstStyle/>
-          <a:p>
-            <a:pPr algn="ctr"/>
-            <a:r>
-              <a:rPr kumimoji="1" lang="zh-CN" altLang="en-US" sz="1335" b="1" dirty="0">
-                <a:solidFill>
-                  <a:schemeClr val="bg1"/>
-                </a:solidFill>
-                <a:latin typeface="微软雅黑" panose="020B0503020204020204" charset="-122"/>
-                <a:ea typeface="微软雅黑" panose="020B0503020204020204" charset="-122"/>
-              </a:rPr>
-              <a:t>留存取证</a:t>
-            </a:r>
-            <a:r>
-              <a:rPr kumimoji="1" lang="zh-CN" altLang="en-US" sz="1335" b="1" dirty="0">
-                <a:solidFill>
-                  <a:schemeClr val="bg1"/>
-                </a:solidFill>
-                <a:latin typeface="黑体" panose="02010609060101010101" charset="-122"/>
-                <a:ea typeface="黑体" panose="02010609060101010101" charset="-122"/>
-              </a:rPr>
-              <a:t>“</a:t>
-            </a:r>
-            <a:r>
-              <a:rPr kumimoji="1" lang="zh-CN" altLang="en-US" sz="1335" b="1" dirty="0">
-                <a:solidFill>
-                  <a:schemeClr val="bg1"/>
-                </a:solidFill>
-                <a:latin typeface="微软雅黑" panose="020B0503020204020204" charset="-122"/>
-                <a:ea typeface="微软雅黑" panose="020B0503020204020204" charset="-122"/>
-              </a:rPr>
-              <a:t>效率低</a:t>
-            </a:r>
-            <a:r>
-              <a:rPr kumimoji="1" lang="zh-CN" altLang="en-US" sz="1335" b="1" dirty="0">
-                <a:solidFill>
-                  <a:schemeClr val="bg1"/>
-                </a:solidFill>
-                <a:latin typeface="黑体" panose="02010609060101010101" charset="-122"/>
-                <a:ea typeface="黑体" panose="02010609060101010101" charset="-122"/>
-              </a:rPr>
-              <a:t>”</a:t>
-            </a:r>
-            <a:endParaRPr kumimoji="1" lang="zh-CN" altLang="en-US" sz="1335" b="1" dirty="0">
-              <a:solidFill>
-                <a:schemeClr val="bg1"/>
-              </a:solidFill>
-              <a:latin typeface="黑体" panose="02010609060101010101" charset="-122"/>
-              <a:ea typeface="黑体" panose="02010609060101010101" charset="-122"/>
-            </a:endParaRPr>
-          </a:p>
-        </p:txBody>
-      </p:sp>
-      <p:sp>
-        <p:nvSpPr>
-          <p:cNvPr id="11" name="文本框 10"/>
-          <p:cNvSpPr txBox="1"/>
-          <p:nvPr/>
-        </p:nvSpPr>
-        <p:spPr>
-          <a:xfrm>
-            <a:off x="7496493" y="7798435"/>
-            <a:ext cx="1855470" cy="297180"/>
-          </a:xfrm>
-          <a:prstGeom prst="rect">
-            <a:avLst/>
-          </a:prstGeom>
-          <a:solidFill>
-            <a:srgbClr val="2E54A1"/>
-          </a:solidFill>
-        </p:spPr>
-        <p:txBody>
-          <a:bodyPr wrap="square" rtlCol="0">
-            <a:spAutoFit/>
-          </a:bodyPr>
-          <a:lstStyle/>
-          <a:p>
-            <a:pPr algn="ctr"/>
-            <a:r>
-              <a:rPr kumimoji="1" lang="zh-CN" altLang="en-US" sz="1335" b="1" dirty="0">
-                <a:solidFill>
-                  <a:schemeClr val="bg1"/>
-                </a:solidFill>
-                <a:latin typeface="微软雅黑" panose="020B0503020204020204" charset="-122"/>
-                <a:ea typeface="微软雅黑" panose="020B0503020204020204" charset="-122"/>
-                <a:sym typeface="+mn-ea"/>
-              </a:rPr>
-              <a:t>目标研判</a:t>
-            </a:r>
-            <a:r>
-              <a:rPr kumimoji="1" lang="zh-CN" altLang="en-US" sz="1335" b="1" dirty="0">
+              </a:endParaRPr>
+            </a:p>
+          </p:txBody>
+        </p:sp>
+        <p:sp>
+          <p:nvSpPr>
+            <p:cNvPr id="11" name="文本框 10"/>
+            <p:cNvSpPr txBox="1"/>
+            <p:nvPr/>
+          </p:nvSpPr>
+          <p:spPr>
+            <a:xfrm>
+              <a:off x="11806" y="12283"/>
+              <a:ext cx="2922" cy="557"/>
+            </a:xfrm>
+            <a:prstGeom prst="rect">
+              <a:avLst/>
+            </a:prstGeom>
+            <a:solidFill>
+              <a:srgbClr val="2E54A1"/>
+            </a:solidFill>
+          </p:spPr>
+          <p:txBody>
+            <a:bodyPr wrap="square" rtlCol="0">
+              <a:spAutoFit/>
+            </a:bodyPr>
+            <a:lstStyle/>
+            <a:p>
+              <a:pPr algn="ctr"/>
+              <a:r>
+                <a:rPr kumimoji="1" lang="zh-CN" altLang="en-US" sz="1335" b="1" dirty="0">
+                  <a:solidFill>
+                    <a:schemeClr val="bg1"/>
+                  </a:solidFill>
+                  <a:latin typeface="微软雅黑" panose="020B0503020204020204" charset="-122"/>
+                  <a:ea typeface="微软雅黑" panose="020B0503020204020204" charset="-122"/>
+                  <a:sym typeface="+mn-ea"/>
+                </a:rPr>
+                <a:t>目标研判</a:t>
+              </a:r>
+              <a:r>
+                <a:rPr kumimoji="1" lang="zh-CN" altLang="en-US" sz="1335" b="1" dirty="0">
+                  <a:solidFill>
+                    <a:schemeClr val="bg1"/>
+                  </a:solidFill>
+                  <a:latin typeface="黑体" panose="02010609060101010101" charset="-122"/>
+                  <a:ea typeface="黑体" panose="02010609060101010101" charset="-122"/>
+                  <a:sym typeface="+mn-ea"/>
+                </a:rPr>
+                <a:t>“</a:t>
+              </a:r>
+              <a:r>
+                <a:rPr kumimoji="1" lang="zh-CN" altLang="en-US" sz="1335" b="1" dirty="0">
+                  <a:solidFill>
+                    <a:schemeClr val="bg1"/>
+                  </a:solidFill>
+                  <a:latin typeface="微软雅黑" panose="020B0503020204020204" charset="-122"/>
+                  <a:ea typeface="微软雅黑" panose="020B0503020204020204" charset="-122"/>
+                  <a:sym typeface="+mn-ea"/>
+                </a:rPr>
+                <a:t>协同难</a:t>
+              </a:r>
+              <a:r>
+                <a:rPr kumimoji="1" lang="zh-CN" altLang="en-US" sz="1335" b="1" dirty="0">
+                  <a:solidFill>
+                    <a:schemeClr val="bg1"/>
+                  </a:solidFill>
+                  <a:latin typeface="黑体" panose="02010609060101010101" charset="-122"/>
+                  <a:ea typeface="黑体" panose="02010609060101010101" charset="-122"/>
+                  <a:sym typeface="+mn-ea"/>
+                </a:rPr>
+                <a:t>”</a:t>
+              </a:r>
+              <a:endParaRPr kumimoji="1" lang="zh-CN" altLang="en-US" sz="1335" b="1" dirty="0">
                 <a:solidFill>
                   <a:schemeClr val="bg1"/>
                 </a:solidFill>
                 <a:latin typeface="黑体" panose="02010609060101010101" charset="-122"/>
                 <a:ea typeface="黑体" panose="02010609060101010101" charset="-122"/>
                 <a:sym typeface="+mn-ea"/>
+              </a:endParaRPr>
+            </a:p>
+          </p:txBody>
+        </p:sp>
+      </p:grpSp>
+      <p:sp>
+        <p:nvSpPr>
+          <p:cNvPr id="12" name="文本框 11"/>
+          <p:cNvSpPr txBox="1"/>
+          <p:nvPr/>
+        </p:nvSpPr>
+        <p:spPr>
+          <a:xfrm>
+            <a:off x="3705225" y="1920240"/>
+            <a:ext cx="3096895" cy="318770"/>
+          </a:xfrm>
+          <a:prstGeom prst="rect">
+            <a:avLst/>
+          </a:prstGeom>
+          <a:solidFill>
+            <a:schemeClr val="bg1"/>
+          </a:solidFill>
+        </p:spPr>
+        <p:txBody>
+          <a:bodyPr wrap="square" rtlCol="0">
+            <a:noAutofit/>
+          </a:bodyPr>
+          <a:lstStyle/>
+          <a:p>
+            <a:pPr algn="ctr"/>
+            <a:r>
+              <a:rPr lang="zh-CN" altLang="en-US" b="1" dirty="0">
+                <a:solidFill>
+                  <a:srgbClr val="C00000"/>
+                </a:solidFill>
               </a:rPr>
-              <a:t>“</a:t>
-            </a:r>
-            <a:r>
-              <a:rPr kumimoji="1" lang="zh-CN" altLang="en-US" sz="1335" b="1" dirty="0">
+              <a:t>海事巡逻平台</a:t>
+            </a:r>
+            <a:endParaRPr lang="zh-CN" altLang="en-US" b="1" dirty="0">
+              <a:solidFill>
+                <a:srgbClr val="C00000"/>
+              </a:solidFill>
+            </a:endParaRPr>
+          </a:p>
+        </p:txBody>
+      </p:sp>
+      <p:sp>
+        <p:nvSpPr>
+          <p:cNvPr id="13" name="文本框 12"/>
+          <p:cNvSpPr txBox="1"/>
+          <p:nvPr/>
+        </p:nvSpPr>
+        <p:spPr>
+          <a:xfrm>
+            <a:off x="1784985" y="5309870"/>
+            <a:ext cx="1451610" cy="296545"/>
+          </a:xfrm>
+          <a:prstGeom prst="rect">
+            <a:avLst/>
+          </a:prstGeom>
+          <a:solidFill>
+            <a:schemeClr val="bg1"/>
+          </a:solidFill>
+        </p:spPr>
+        <p:txBody>
+          <a:bodyPr wrap="square" rtlCol="0">
+            <a:noAutofit/>
+          </a:bodyPr>
+          <a:lstStyle/>
+          <a:p>
+            <a:pPr algn="ctr"/>
+            <a:r>
+              <a:rPr lang="zh-CN" altLang="en-US" sz="1400" b="1" dirty="0">
                 <a:solidFill>
-                  <a:schemeClr val="bg1"/>
+                  <a:srgbClr val="C00000"/>
                 </a:solidFill>
-                <a:latin typeface="微软雅黑" panose="020B0503020204020204" charset="-122"/>
-                <a:ea typeface="微软雅黑" panose="020B0503020204020204" charset="-122"/>
-                <a:sym typeface="+mn-ea"/>
               </a:rPr>
-              <a:t>协同难</a:t>
-            </a:r>
-            <a:r>
-              <a:rPr kumimoji="1" lang="zh-CN" altLang="en-US" sz="1335" b="1" dirty="0">
+              <a:t>无人水面航行器</a:t>
+            </a:r>
+            <a:endParaRPr lang="zh-CN" altLang="en-US" sz="1400" b="1" dirty="0">
+              <a:solidFill>
+                <a:srgbClr val="C00000"/>
+              </a:solidFill>
+            </a:endParaRPr>
+          </a:p>
+        </p:txBody>
+      </p:sp>
+      <p:sp>
+        <p:nvSpPr>
+          <p:cNvPr id="15" name="文本框 14"/>
+          <p:cNvSpPr txBox="1"/>
+          <p:nvPr/>
+        </p:nvSpPr>
+        <p:spPr>
+          <a:xfrm>
+            <a:off x="4678680" y="5309870"/>
+            <a:ext cx="1293495" cy="296545"/>
+          </a:xfrm>
+          <a:prstGeom prst="rect">
+            <a:avLst/>
+          </a:prstGeom>
+          <a:solidFill>
+            <a:schemeClr val="bg1"/>
+          </a:solidFill>
+        </p:spPr>
+        <p:txBody>
+          <a:bodyPr wrap="square" rtlCol="0">
+            <a:noAutofit/>
+          </a:bodyPr>
+          <a:lstStyle/>
+          <a:p>
+            <a:pPr algn="ctr"/>
+            <a:r>
+              <a:rPr lang="zh-CN" altLang="en-US" sz="1400" b="1" dirty="0">
                 <a:solidFill>
-                  <a:schemeClr val="bg1"/>
+                  <a:srgbClr val="C00000"/>
                 </a:solidFill>
-                <a:latin typeface="黑体" panose="02010609060101010101" charset="-122"/>
-                <a:ea typeface="黑体" panose="02010609060101010101" charset="-122"/>
-                <a:sym typeface="+mn-ea"/>
               </a:rPr>
-              <a:t>”</a:t>
-            </a:r>
-            <a:endParaRPr kumimoji="1" lang="zh-CN" altLang="en-US" sz="1335" b="1" dirty="0">
+              <a:t>无人监测浮标</a:t>
+            </a:r>
+            <a:endParaRPr lang="zh-CN" altLang="en-US" sz="1400" b="1" dirty="0">
               <a:solidFill>
-                <a:schemeClr val="bg1"/>
+                <a:srgbClr val="C00000"/>
               </a:solidFill>
-              <a:latin typeface="黑体" panose="02010609060101010101" charset="-122"/>
-              <a:ea typeface="黑体" panose="02010609060101010101" charset="-122"/>
-              <a:sym typeface="+mn-ea"/>
+            </a:endParaRPr>
+          </a:p>
+        </p:txBody>
+      </p:sp>
+      <p:sp>
+        <p:nvSpPr>
+          <p:cNvPr id="16" name="文本框 15"/>
+          <p:cNvSpPr txBox="1"/>
+          <p:nvPr/>
+        </p:nvSpPr>
+        <p:spPr>
+          <a:xfrm>
+            <a:off x="7447280" y="5309870"/>
+            <a:ext cx="1635760" cy="296545"/>
+          </a:xfrm>
+          <a:prstGeom prst="rect">
+            <a:avLst/>
+          </a:prstGeom>
+          <a:solidFill>
+            <a:schemeClr val="bg1"/>
+          </a:solidFill>
+        </p:spPr>
+        <p:txBody>
+          <a:bodyPr wrap="square" rtlCol="0">
+            <a:noAutofit/>
+          </a:bodyPr>
+          <a:lstStyle/>
+          <a:p>
+            <a:pPr algn="ctr"/>
+            <a:r>
+              <a:rPr lang="zh-CN" altLang="en-US" sz="1400" b="1" dirty="0">
+                <a:solidFill>
+                  <a:srgbClr val="C00000"/>
+                </a:solidFill>
+              </a:rPr>
+              <a:t>无人海面漂移平台</a:t>
+            </a:r>
+            <a:endParaRPr lang="zh-CN" altLang="en-US" sz="1400" b="1" dirty="0">
+              <a:solidFill>
+                <a:srgbClr val="C00000"/>
+              </a:solidFill>
             </a:endParaRPr>
           </a:p>
         </p:txBody>
